--- a/media/exports/trades-sample-statements.pptx
+++ b/media/exports/trades-sample-statements.pptx
@@ -17345,73 +17345,73 @@
                             <a:srgbClr val="25342A"/>
                           </a:solidFill>
                         </a:rPr>
-                        <a:t>Call-outs and repairs</a:t>
-                      </a:r>
-                    </a:p>
-                  </a:txBody>
-                  <a:tcPr>
-                    <a:solidFill>
-                      <a:srgbClr val="FFFFFF"/>
-                    </a:solidFill>
-                  </a:tcPr>
-                </a:tc>
-                <a:tc>
-                  <a:txBody>
-                    <a:bodyPr/>
-                    <a:lstStyle/>
-                    <a:p>
-                      <a:pPr algn="r"/>
-                      <a:r>
-                        <a:rPr sz="1050">
-                          <a:solidFill>
-                            <a:srgbClr val="25342A"/>
-                          </a:solidFill>
-                        </a:rPr>
-                        <a:t>31,137</a:t>
-                      </a:r>
-                    </a:p>
-                  </a:txBody>
-                  <a:tcPr>
-                    <a:solidFill>
-                      <a:srgbClr val="FFFFFF"/>
-                    </a:solidFill>
-                  </a:tcPr>
-                </a:tc>
-                <a:tc>
-                  <a:txBody>
-                    <a:bodyPr/>
-                    <a:lstStyle/>
-                    <a:p>
-                      <a:pPr algn="r"/>
-                      <a:r>
-                        <a:rPr sz="1050">
-                          <a:solidFill>
-                            <a:srgbClr val="25342A"/>
-                          </a:solidFill>
-                        </a:rPr>
-                        <a:t>28,907</a:t>
-                      </a:r>
-                    </a:p>
-                  </a:txBody>
-                  <a:tcPr>
-                    <a:solidFill>
-                      <a:srgbClr val="FFFFFF"/>
-                    </a:solidFill>
-                  </a:tcPr>
-                </a:tc>
-                <a:tc>
-                  <a:txBody>
-                    <a:bodyPr/>
-                    <a:lstStyle/>
-                    <a:p>
-                      <a:pPr algn="r"/>
-                      <a:r>
-                        <a:rPr sz="1050">
-                          <a:solidFill>
-                            <a:srgbClr val="25342A"/>
-                          </a:solidFill>
-                        </a:rPr>
-                        <a:t>2,230</a:t>
+                        <a:t>Call-outs: technician time</a:t>
+                      </a:r>
+                    </a:p>
+                  </a:txBody>
+                  <a:tcPr>
+                    <a:solidFill>
+                      <a:srgbClr val="FFFFFF"/>
+                    </a:solidFill>
+                  </a:tcPr>
+                </a:tc>
+                <a:tc>
+                  <a:txBody>
+                    <a:bodyPr/>
+                    <a:lstStyle/>
+                    <a:p>
+                      <a:pPr algn="r"/>
+                      <a:r>
+                        <a:rPr sz="1050">
+                          <a:solidFill>
+                            <a:srgbClr val="25342A"/>
+                          </a:solidFill>
+                        </a:rPr>
+                        <a:t>21,543</a:t>
+                      </a:r>
+                    </a:p>
+                  </a:txBody>
+                  <a:tcPr>
+                    <a:solidFill>
+                      <a:srgbClr val="FFFFFF"/>
+                    </a:solidFill>
+                  </a:tcPr>
+                </a:tc>
+                <a:tc>
+                  <a:txBody>
+                    <a:bodyPr/>
+                    <a:lstStyle/>
+                    <a:p>
+                      <a:pPr algn="r"/>
+                      <a:r>
+                        <a:rPr sz="1050">
+                          <a:solidFill>
+                            <a:srgbClr val="25342A"/>
+                          </a:solidFill>
+                        </a:rPr>
+                        <a:t>19,872</a:t>
+                      </a:r>
+                    </a:p>
+                  </a:txBody>
+                  <a:tcPr>
+                    <a:solidFill>
+                      <a:srgbClr val="FFFFFF"/>
+                    </a:solidFill>
+                  </a:tcPr>
+                </a:tc>
+                <a:tc>
+                  <a:txBody>
+                    <a:bodyPr/>
+                    <a:lstStyle/>
+                    <a:p>
+                      <a:pPr algn="r"/>
+                      <a:r>
+                        <a:rPr sz="1050">
+                          <a:solidFill>
+                            <a:srgbClr val="25342A"/>
+                          </a:solidFill>
+                        </a:rPr>
+                        <a:t>1,671</a:t>
                       </a:r>
                     </a:p>
                   </a:txBody>
@@ -17429,78 +17429,78 @@
                     <a:lstStyle/>
                     <a:p>
                       <a:r>
-                        <a:rPr sz="1050" b="1">
-                          <a:solidFill>
-                            <a:srgbClr val="25342A"/>
-                          </a:solidFill>
-                        </a:rPr>
-                        <a:t>Total revenue</a:t>
-                      </a:r>
-                    </a:p>
-                  </a:txBody>
-                  <a:tcPr>
-                    <a:solidFill>
-                      <a:srgbClr val="F7FAF7"/>
-                    </a:solidFill>
-                  </a:tcPr>
-                </a:tc>
-                <a:tc>
-                  <a:txBody>
-                    <a:bodyPr/>
-                    <a:lstStyle/>
-                    <a:p>
-                      <a:pPr algn="r"/>
-                      <a:r>
-                        <a:rPr sz="1050" b="1">
-                          <a:solidFill>
-                            <a:srgbClr val="25342A"/>
-                          </a:solidFill>
-                        </a:rPr>
-                        <a:t>202,337</a:t>
-                      </a:r>
-                    </a:p>
-                  </a:txBody>
-                  <a:tcPr>
-                    <a:solidFill>
-                      <a:srgbClr val="F7FAF7"/>
-                    </a:solidFill>
-                  </a:tcPr>
-                </a:tc>
-                <a:tc>
-                  <a:txBody>
-                    <a:bodyPr/>
-                    <a:lstStyle/>
-                    <a:p>
-                      <a:pPr algn="r"/>
-                      <a:r>
-                        <a:rPr sz="1050" b="1">
-                          <a:solidFill>
-                            <a:srgbClr val="25342A"/>
-                          </a:solidFill>
-                        </a:rPr>
-                        <a:t>179,007</a:t>
-                      </a:r>
-                    </a:p>
-                  </a:txBody>
-                  <a:tcPr>
-                    <a:solidFill>
-                      <a:srgbClr val="F7FAF7"/>
-                    </a:solidFill>
-                  </a:tcPr>
-                </a:tc>
-                <a:tc>
-                  <a:txBody>
-                    <a:bodyPr/>
-                    <a:lstStyle/>
-                    <a:p>
-                      <a:pPr algn="r"/>
-                      <a:r>
-                        <a:rPr sz="1050" b="1">
-                          <a:solidFill>
-                            <a:srgbClr val="25342A"/>
-                          </a:solidFill>
-                        </a:rPr>
-                        <a:t>23,330</a:t>
+                        <a:rPr sz="1050">
+                          <a:solidFill>
+                            <a:srgbClr val="25342A"/>
+                          </a:solidFill>
+                        </a:rPr>
+                        <a:t>Call-outs: materials charged</a:t>
+                      </a:r>
+                    </a:p>
+                  </a:txBody>
+                  <a:tcPr>
+                    <a:solidFill>
+                      <a:srgbClr val="F7FAF7"/>
+                    </a:solidFill>
+                  </a:tcPr>
+                </a:tc>
+                <a:tc>
+                  <a:txBody>
+                    <a:bodyPr/>
+                    <a:lstStyle/>
+                    <a:p>
+                      <a:pPr algn="r"/>
+                      <a:r>
+                        <a:rPr sz="1050">
+                          <a:solidFill>
+                            <a:srgbClr val="25342A"/>
+                          </a:solidFill>
+                        </a:rPr>
+                        <a:t>9,594</a:t>
+                      </a:r>
+                    </a:p>
+                  </a:txBody>
+                  <a:tcPr>
+                    <a:solidFill>
+                      <a:srgbClr val="F7FAF7"/>
+                    </a:solidFill>
+                  </a:tcPr>
+                </a:tc>
+                <a:tc>
+                  <a:txBody>
+                    <a:bodyPr/>
+                    <a:lstStyle/>
+                    <a:p>
+                      <a:pPr algn="r"/>
+                      <a:r>
+                        <a:rPr sz="1050">
+                          <a:solidFill>
+                            <a:srgbClr val="25342A"/>
+                          </a:solidFill>
+                        </a:rPr>
+                        <a:t>9,035</a:t>
+                      </a:r>
+                    </a:p>
+                  </a:txBody>
+                  <a:tcPr>
+                    <a:solidFill>
+                      <a:srgbClr val="F7FAF7"/>
+                    </a:solidFill>
+                  </a:tcPr>
+                </a:tc>
+                <a:tc>
+                  <a:txBody>
+                    <a:bodyPr/>
+                    <a:lstStyle/>
+                    <a:p>
+                      <a:pPr algn="r"/>
+                      <a:r>
+                        <a:rPr sz="1050">
+                          <a:solidFill>
+                            <a:srgbClr val="25342A"/>
+                          </a:solidFill>
+                        </a:rPr>
+                        <a:t>559</a:t>
                       </a:r>
                     </a:p>
                   </a:txBody>
@@ -17518,78 +17518,78 @@
                     <a:lstStyle/>
                     <a:p>
                       <a:r>
-                        <a:rPr sz="1050">
-                          <a:solidFill>
-                            <a:srgbClr val="25342A"/>
-                          </a:solidFill>
-                        </a:rPr>
-                        <a:t>Materials</a:t>
-                      </a:r>
-                    </a:p>
-                  </a:txBody>
-                  <a:tcPr>
-                    <a:solidFill>
-                      <a:srgbClr val="FFFFFF"/>
-                    </a:solidFill>
-                  </a:tcPr>
-                </a:tc>
-                <a:tc>
-                  <a:txBody>
-                    <a:bodyPr/>
-                    <a:lstStyle/>
-                    <a:p>
-                      <a:pPr algn="r"/>
-                      <a:r>
-                        <a:rPr sz="1050">
-                          <a:solidFill>
-                            <a:srgbClr val="B42318"/>
-                          </a:solidFill>
-                        </a:rPr>
-                        <a:t>(64,860)</a:t>
-                      </a:r>
-                    </a:p>
-                  </a:txBody>
-                  <a:tcPr>
-                    <a:solidFill>
-                      <a:srgbClr val="FFFFFF"/>
-                    </a:solidFill>
-                  </a:tcPr>
-                </a:tc>
-                <a:tc>
-                  <a:txBody>
-                    <a:bodyPr/>
-                    <a:lstStyle/>
-                    <a:p>
-                      <a:pPr algn="r"/>
-                      <a:r>
-                        <a:rPr sz="1050">
-                          <a:solidFill>
-                            <a:srgbClr val="B42318"/>
-                          </a:solidFill>
-                        </a:rPr>
-                        <a:t>(51,530)</a:t>
-                      </a:r>
-                    </a:p>
-                  </a:txBody>
-                  <a:tcPr>
-                    <a:solidFill>
-                      <a:srgbClr val="FFFFFF"/>
-                    </a:solidFill>
-                  </a:tcPr>
-                </a:tc>
-                <a:tc>
-                  <a:txBody>
-                    <a:bodyPr/>
-                    <a:lstStyle/>
-                    <a:p>
-                      <a:pPr algn="r"/>
-                      <a:r>
-                        <a:rPr sz="1050">
-                          <a:solidFill>
-                            <a:srgbClr val="B42318"/>
-                          </a:solidFill>
-                        </a:rPr>
-                        <a:t>(13,330)</a:t>
+                        <a:rPr sz="1050" b="1">
+                          <a:solidFill>
+                            <a:srgbClr val="25342A"/>
+                          </a:solidFill>
+                        </a:rPr>
+                        <a:t>Total revenue</a:t>
+                      </a:r>
+                    </a:p>
+                  </a:txBody>
+                  <a:tcPr>
+                    <a:solidFill>
+                      <a:srgbClr val="FFFFFF"/>
+                    </a:solidFill>
+                  </a:tcPr>
+                </a:tc>
+                <a:tc>
+                  <a:txBody>
+                    <a:bodyPr/>
+                    <a:lstStyle/>
+                    <a:p>
+                      <a:pPr algn="r"/>
+                      <a:r>
+                        <a:rPr sz="1050" b="1">
+                          <a:solidFill>
+                            <a:srgbClr val="25342A"/>
+                          </a:solidFill>
+                        </a:rPr>
+                        <a:t>202,337</a:t>
+                      </a:r>
+                    </a:p>
+                  </a:txBody>
+                  <a:tcPr>
+                    <a:solidFill>
+                      <a:srgbClr val="FFFFFF"/>
+                    </a:solidFill>
+                  </a:tcPr>
+                </a:tc>
+                <a:tc>
+                  <a:txBody>
+                    <a:bodyPr/>
+                    <a:lstStyle/>
+                    <a:p>
+                      <a:pPr algn="r"/>
+                      <a:r>
+                        <a:rPr sz="1050" b="1">
+                          <a:solidFill>
+                            <a:srgbClr val="25342A"/>
+                          </a:solidFill>
+                        </a:rPr>
+                        <a:t>179,007</a:t>
+                      </a:r>
+                    </a:p>
+                  </a:txBody>
+                  <a:tcPr>
+                    <a:solidFill>
+                      <a:srgbClr val="FFFFFF"/>
+                    </a:solidFill>
+                  </a:tcPr>
+                </a:tc>
+                <a:tc>
+                  <a:txBody>
+                    <a:bodyPr/>
+                    <a:lstStyle/>
+                    <a:p>
+                      <a:pPr algn="r"/>
+                      <a:r>
+                        <a:rPr sz="1050" b="1">
+                          <a:solidFill>
+                            <a:srgbClr val="25342A"/>
+                          </a:solidFill>
+                        </a:rPr>
+                        <a:t>23,330</a:t>
                       </a:r>
                     </a:p>
                   </a:txBody>
@@ -17612,7 +17612,7 @@
                             <a:srgbClr val="25342A"/>
                           </a:solidFill>
                         </a:rPr>
-                        <a:t>Subcontractors</a:t>
+                        <a:t>Materials</a:t>
                       </a:r>
                     </a:p>
                   </a:txBody>
@@ -17634,7 +17634,7 @@
                             <a:srgbClr val="B42318"/>
                           </a:solidFill>
                         </a:rPr>
-                        <a:t>(13,200)</a:t>
+                        <a:t>(64,860)</a:t>
                       </a:r>
                     </a:p>
                   </a:txBody>
@@ -17656,7 +17656,7 @@
                             <a:srgbClr val="B42318"/>
                           </a:solidFill>
                         </a:rPr>
-                        <a:t>(9,300)</a:t>
+                        <a:t>(51,530)</a:t>
                       </a:r>
                     </a:p>
                   </a:txBody>
@@ -17678,7 +17678,7 @@
                             <a:srgbClr val="B42318"/>
                           </a:solidFill>
                         </a:rPr>
-                        <a:t>(3,900)</a:t>
+                        <a:t>(13,330)</a:t>
                       </a:r>
                     </a:p>
                   </a:txBody>
@@ -17701,7 +17701,7 @@
                             <a:srgbClr val="25342A"/>
                           </a:solidFill>
                         </a:rPr>
-                        <a:t>Technician wages (incl. on-costs)</a:t>
+                        <a:t>Subcontractors</a:t>
                       </a:r>
                     </a:p>
                   </a:txBody>
@@ -17723,7 +17723,7 @@
                             <a:srgbClr val="B42318"/>
                           </a:solidFill>
                         </a:rPr>
-                        <a:t>(54,600)</a:t>
+                        <a:t>(13,200)</a:t>
                       </a:r>
                     </a:p>
                   </a:txBody>
@@ -17745,29 +17745,29 @@
                             <a:srgbClr val="B42318"/>
                           </a:solidFill>
                         </a:rPr>
-                        <a:t>(54,600)</a:t>
-                      </a:r>
-                    </a:p>
-                  </a:txBody>
-                  <a:tcPr>
-                    <a:solidFill>
-                      <a:srgbClr val="FFFFFF"/>
-                    </a:solidFill>
-                  </a:tcPr>
-                </a:tc>
-                <a:tc>
-                  <a:txBody>
-                    <a:bodyPr/>
-                    <a:lstStyle/>
-                    <a:p>
-                      <a:pPr algn="r"/>
-                      <a:r>
-                        <a:rPr sz="1050">
-                          <a:solidFill>
-                            <a:srgbClr val="25342A"/>
-                          </a:solidFill>
-                        </a:rPr>
-                        <a:t>-</a:t>
+                        <a:t>(9,300)</a:t>
+                      </a:r>
+                    </a:p>
+                  </a:txBody>
+                  <a:tcPr>
+                    <a:solidFill>
+                      <a:srgbClr val="FFFFFF"/>
+                    </a:solidFill>
+                  </a:tcPr>
+                </a:tc>
+                <a:tc>
+                  <a:txBody>
+                    <a:bodyPr/>
+                    <a:lstStyle/>
+                    <a:p>
+                      <a:pPr algn="r"/>
+                      <a:r>
+                        <a:rPr sz="1050">
+                          <a:solidFill>
+                            <a:srgbClr val="B42318"/>
+                          </a:solidFill>
+                        </a:rPr>
+                        <a:t>(3,900)</a:t>
                       </a:r>
                     </a:p>
                   </a:txBody>
@@ -17785,78 +17785,78 @@
                     <a:lstStyle/>
                     <a:p>
                       <a:r>
-                        <a:rPr sz="1050" b="1">
-                          <a:solidFill>
-                            <a:srgbClr val="25342A"/>
-                          </a:solidFill>
-                        </a:rPr>
-                        <a:t>Total cost of sales</a:t>
-                      </a:r>
-                    </a:p>
-                  </a:txBody>
-                  <a:tcPr>
-                    <a:solidFill>
-                      <a:srgbClr val="F7FAF7"/>
-                    </a:solidFill>
-                  </a:tcPr>
-                </a:tc>
-                <a:tc>
-                  <a:txBody>
-                    <a:bodyPr/>
-                    <a:lstStyle/>
-                    <a:p>
-                      <a:pPr algn="r"/>
-                      <a:r>
-                        <a:rPr sz="1050" b="1">
+                        <a:rPr sz="1050">
+                          <a:solidFill>
+                            <a:srgbClr val="25342A"/>
+                          </a:solidFill>
+                        </a:rPr>
+                        <a:t>Technician wages (incl. on-costs)</a:t>
+                      </a:r>
+                    </a:p>
+                  </a:txBody>
+                  <a:tcPr>
+                    <a:solidFill>
+                      <a:srgbClr val="F7FAF7"/>
+                    </a:solidFill>
+                  </a:tcPr>
+                </a:tc>
+                <a:tc>
+                  <a:txBody>
+                    <a:bodyPr/>
+                    <a:lstStyle/>
+                    <a:p>
+                      <a:pPr algn="r"/>
+                      <a:r>
+                        <a:rPr sz="1050">
                           <a:solidFill>
                             <a:srgbClr val="B42318"/>
                           </a:solidFill>
                         </a:rPr>
-                        <a:t>(132,660)</a:t>
-                      </a:r>
-                    </a:p>
-                  </a:txBody>
-                  <a:tcPr>
-                    <a:solidFill>
-                      <a:srgbClr val="F7FAF7"/>
-                    </a:solidFill>
-                  </a:tcPr>
-                </a:tc>
-                <a:tc>
-                  <a:txBody>
-                    <a:bodyPr/>
-                    <a:lstStyle/>
-                    <a:p>
-                      <a:pPr algn="r"/>
-                      <a:r>
-                        <a:rPr sz="1050" b="1">
+                        <a:t>(54,600)</a:t>
+                      </a:r>
+                    </a:p>
+                  </a:txBody>
+                  <a:tcPr>
+                    <a:solidFill>
+                      <a:srgbClr val="F7FAF7"/>
+                    </a:solidFill>
+                  </a:tcPr>
+                </a:tc>
+                <a:tc>
+                  <a:txBody>
+                    <a:bodyPr/>
+                    <a:lstStyle/>
+                    <a:p>
+                      <a:pPr algn="r"/>
+                      <a:r>
+                        <a:rPr sz="1050">
                           <a:solidFill>
                             <a:srgbClr val="B42318"/>
                           </a:solidFill>
                         </a:rPr>
-                        <a:t>(115,430)</a:t>
-                      </a:r>
-                    </a:p>
-                  </a:txBody>
-                  <a:tcPr>
-                    <a:solidFill>
-                      <a:srgbClr val="F7FAF7"/>
-                    </a:solidFill>
-                  </a:tcPr>
-                </a:tc>
-                <a:tc>
-                  <a:txBody>
-                    <a:bodyPr/>
-                    <a:lstStyle/>
-                    <a:p>
-                      <a:pPr algn="r"/>
-                      <a:r>
-                        <a:rPr sz="1050" b="1">
-                          <a:solidFill>
-                            <a:srgbClr val="B42318"/>
-                          </a:solidFill>
-                        </a:rPr>
-                        <a:t>(17,230)</a:t>
+                        <a:t>(54,600)</a:t>
+                      </a:r>
+                    </a:p>
+                  </a:txBody>
+                  <a:tcPr>
+                    <a:solidFill>
+                      <a:srgbClr val="F7FAF7"/>
+                    </a:solidFill>
+                  </a:tcPr>
+                </a:tc>
+                <a:tc>
+                  <a:txBody>
+                    <a:bodyPr/>
+                    <a:lstStyle/>
+                    <a:p>
+                      <a:pPr algn="r"/>
+                      <a:r>
+                        <a:rPr sz="1050">
+                          <a:solidFill>
+                            <a:srgbClr val="25342A"/>
+                          </a:solidFill>
+                        </a:rPr>
+                        <a:t>-</a:t>
                       </a:r>
                     </a:p>
                   </a:txBody>
@@ -17874,78 +17874,78 @@
                     <a:lstStyle/>
                     <a:p>
                       <a:r>
-                        <a:rPr sz="1050">
-                          <a:solidFill>
-                            <a:srgbClr val="25342A"/>
-                          </a:solidFill>
-                        </a:rPr>
-                        <a:t>Gross profit</a:t>
-                      </a:r>
-                    </a:p>
-                  </a:txBody>
-                  <a:tcPr>
-                    <a:solidFill>
-                      <a:srgbClr val="FFFFFF"/>
-                    </a:solidFill>
-                  </a:tcPr>
-                </a:tc>
-                <a:tc>
-                  <a:txBody>
-                    <a:bodyPr/>
-                    <a:lstStyle/>
-                    <a:p>
-                      <a:pPr algn="r"/>
-                      <a:r>
-                        <a:rPr sz="1050">
-                          <a:solidFill>
-                            <a:srgbClr val="25342A"/>
-                          </a:solidFill>
-                        </a:rPr>
-                        <a:t>69,677</a:t>
-                      </a:r>
-                    </a:p>
-                  </a:txBody>
-                  <a:tcPr>
-                    <a:solidFill>
-                      <a:srgbClr val="FFFFFF"/>
-                    </a:solidFill>
-                  </a:tcPr>
-                </a:tc>
-                <a:tc>
-                  <a:txBody>
-                    <a:bodyPr/>
-                    <a:lstStyle/>
-                    <a:p>
-                      <a:pPr algn="r"/>
-                      <a:r>
-                        <a:rPr sz="1050">
-                          <a:solidFill>
-                            <a:srgbClr val="25342A"/>
-                          </a:solidFill>
-                        </a:rPr>
-                        <a:t>63,577</a:t>
-                      </a:r>
-                    </a:p>
-                  </a:txBody>
-                  <a:tcPr>
-                    <a:solidFill>
-                      <a:srgbClr val="FFFFFF"/>
-                    </a:solidFill>
-                  </a:tcPr>
-                </a:tc>
-                <a:tc>
-                  <a:txBody>
-                    <a:bodyPr/>
-                    <a:lstStyle/>
-                    <a:p>
-                      <a:pPr algn="r"/>
-                      <a:r>
-                        <a:rPr sz="1050">
-                          <a:solidFill>
-                            <a:srgbClr val="25342A"/>
-                          </a:solidFill>
-                        </a:rPr>
-                        <a:t>6,100</a:t>
+                        <a:rPr sz="1050" b="1">
+                          <a:solidFill>
+                            <a:srgbClr val="25342A"/>
+                          </a:solidFill>
+                        </a:rPr>
+                        <a:t>Total cost of sales</a:t>
+                      </a:r>
+                    </a:p>
+                  </a:txBody>
+                  <a:tcPr>
+                    <a:solidFill>
+                      <a:srgbClr val="FFFFFF"/>
+                    </a:solidFill>
+                  </a:tcPr>
+                </a:tc>
+                <a:tc>
+                  <a:txBody>
+                    <a:bodyPr/>
+                    <a:lstStyle/>
+                    <a:p>
+                      <a:pPr algn="r"/>
+                      <a:r>
+                        <a:rPr sz="1050" b="1">
+                          <a:solidFill>
+                            <a:srgbClr val="B42318"/>
+                          </a:solidFill>
+                        </a:rPr>
+                        <a:t>(132,660)</a:t>
+                      </a:r>
+                    </a:p>
+                  </a:txBody>
+                  <a:tcPr>
+                    <a:solidFill>
+                      <a:srgbClr val="FFFFFF"/>
+                    </a:solidFill>
+                  </a:tcPr>
+                </a:tc>
+                <a:tc>
+                  <a:txBody>
+                    <a:bodyPr/>
+                    <a:lstStyle/>
+                    <a:p>
+                      <a:pPr algn="r"/>
+                      <a:r>
+                        <a:rPr sz="1050" b="1">
+                          <a:solidFill>
+                            <a:srgbClr val="B42318"/>
+                          </a:solidFill>
+                        </a:rPr>
+                        <a:t>(115,430)</a:t>
+                      </a:r>
+                    </a:p>
+                  </a:txBody>
+                  <a:tcPr>
+                    <a:solidFill>
+                      <a:srgbClr val="FFFFFF"/>
+                    </a:solidFill>
+                  </a:tcPr>
+                </a:tc>
+                <a:tc>
+                  <a:txBody>
+                    <a:bodyPr/>
+                    <a:lstStyle/>
+                    <a:p>
+                      <a:pPr algn="r"/>
+                      <a:r>
+                        <a:rPr sz="1050" b="1">
+                          <a:solidFill>
+                            <a:srgbClr val="B42318"/>
+                          </a:solidFill>
+                        </a:rPr>
+                        <a:t>(17,230)</a:t>
                       </a:r>
                     </a:p>
                   </a:txBody>
@@ -17968,73 +17968,73 @@
                             <a:srgbClr val="25342A"/>
                           </a:solidFill>
                         </a:rPr>
-                        <a:t>Office and admin wages</a:t>
-                      </a:r>
-                    </a:p>
-                  </a:txBody>
-                  <a:tcPr>
-                    <a:solidFill>
-                      <a:srgbClr val="F7FAF7"/>
-                    </a:solidFill>
-                  </a:tcPr>
-                </a:tc>
-                <a:tc>
-                  <a:txBody>
-                    <a:bodyPr/>
-                    <a:lstStyle/>
-                    <a:p>
-                      <a:pPr algn="r"/>
-                      <a:r>
-                        <a:rPr sz="1050">
-                          <a:solidFill>
-                            <a:srgbClr val="B42318"/>
-                          </a:solidFill>
-                        </a:rPr>
-                        <a:t>(21,900)</a:t>
-                      </a:r>
-                    </a:p>
-                  </a:txBody>
-                  <a:tcPr>
-                    <a:solidFill>
-                      <a:srgbClr val="F7FAF7"/>
-                    </a:solidFill>
-                  </a:tcPr>
-                </a:tc>
-                <a:tc>
-                  <a:txBody>
-                    <a:bodyPr/>
-                    <a:lstStyle/>
-                    <a:p>
-                      <a:pPr algn="r"/>
-                      <a:r>
-                        <a:rPr sz="1050">
-                          <a:solidFill>
-                            <a:srgbClr val="B42318"/>
-                          </a:solidFill>
-                        </a:rPr>
-                        <a:t>(21,900)</a:t>
-                      </a:r>
-                    </a:p>
-                  </a:txBody>
-                  <a:tcPr>
-                    <a:solidFill>
-                      <a:srgbClr val="F7FAF7"/>
-                    </a:solidFill>
-                  </a:tcPr>
-                </a:tc>
-                <a:tc>
-                  <a:txBody>
-                    <a:bodyPr/>
-                    <a:lstStyle/>
-                    <a:p>
-                      <a:pPr algn="r"/>
-                      <a:r>
-                        <a:rPr sz="1050">
-                          <a:solidFill>
-                            <a:srgbClr val="25342A"/>
-                          </a:solidFill>
-                        </a:rPr>
-                        <a:t>-</a:t>
+                        <a:t>Gross profit</a:t>
+                      </a:r>
+                    </a:p>
+                  </a:txBody>
+                  <a:tcPr>
+                    <a:solidFill>
+                      <a:srgbClr val="F7FAF7"/>
+                    </a:solidFill>
+                  </a:tcPr>
+                </a:tc>
+                <a:tc>
+                  <a:txBody>
+                    <a:bodyPr/>
+                    <a:lstStyle/>
+                    <a:p>
+                      <a:pPr algn="r"/>
+                      <a:r>
+                        <a:rPr sz="1050">
+                          <a:solidFill>
+                            <a:srgbClr val="25342A"/>
+                          </a:solidFill>
+                        </a:rPr>
+                        <a:t>69,677</a:t>
+                      </a:r>
+                    </a:p>
+                  </a:txBody>
+                  <a:tcPr>
+                    <a:solidFill>
+                      <a:srgbClr val="F7FAF7"/>
+                    </a:solidFill>
+                  </a:tcPr>
+                </a:tc>
+                <a:tc>
+                  <a:txBody>
+                    <a:bodyPr/>
+                    <a:lstStyle/>
+                    <a:p>
+                      <a:pPr algn="r"/>
+                      <a:r>
+                        <a:rPr sz="1050">
+                          <a:solidFill>
+                            <a:srgbClr val="25342A"/>
+                          </a:solidFill>
+                        </a:rPr>
+                        <a:t>63,577</a:t>
+                      </a:r>
+                    </a:p>
+                  </a:txBody>
+                  <a:tcPr>
+                    <a:solidFill>
+                      <a:srgbClr val="F7FAF7"/>
+                    </a:solidFill>
+                  </a:tcPr>
+                </a:tc>
+                <a:tc>
+                  <a:txBody>
+                    <a:bodyPr/>
+                    <a:lstStyle/>
+                    <a:p>
+                      <a:pPr algn="r"/>
+                      <a:r>
+                        <a:rPr sz="1050">
+                          <a:solidFill>
+                            <a:srgbClr val="25342A"/>
+                          </a:solidFill>
+                        </a:rPr>
+                        <a:t>6,100</a:t>
                       </a:r>
                     </a:p>
                   </a:txBody>
@@ -18057,7 +18057,7 @@
                             <a:srgbClr val="25342A"/>
                           </a:solidFill>
                         </a:rPr>
-                        <a:t>Marketing</a:t>
+                        <a:t>Office and admin wages</a:t>
                       </a:r>
                     </a:p>
                   </a:txBody>
@@ -18079,7 +18079,7 @@
                             <a:srgbClr val="B42318"/>
                           </a:solidFill>
                         </a:rPr>
-                        <a:t>(7,600)</a:t>
+                        <a:t>(21,900)</a:t>
                       </a:r>
                     </a:p>
                   </a:txBody>
@@ -18101,29 +18101,29 @@
                             <a:srgbClr val="B42318"/>
                           </a:solidFill>
                         </a:rPr>
-                        <a:t>(8,400)</a:t>
-                      </a:r>
-                    </a:p>
-                  </a:txBody>
-                  <a:tcPr>
-                    <a:solidFill>
-                      <a:srgbClr val="FFFFFF"/>
-                    </a:solidFill>
-                  </a:tcPr>
-                </a:tc>
-                <a:tc>
-                  <a:txBody>
-                    <a:bodyPr/>
-                    <a:lstStyle/>
-                    <a:p>
-                      <a:pPr algn="r"/>
-                      <a:r>
-                        <a:rPr sz="1050">
-                          <a:solidFill>
-                            <a:srgbClr val="25342A"/>
-                          </a:solidFill>
-                        </a:rPr>
-                        <a:t>800</a:t>
+                        <a:t>(21,900)</a:t>
+                      </a:r>
+                    </a:p>
+                  </a:txBody>
+                  <a:tcPr>
+                    <a:solidFill>
+                      <a:srgbClr val="FFFFFF"/>
+                    </a:solidFill>
+                  </a:tcPr>
+                </a:tc>
+                <a:tc>
+                  <a:txBody>
+                    <a:bodyPr/>
+                    <a:lstStyle/>
+                    <a:p>
+                      <a:pPr algn="r"/>
+                      <a:r>
+                        <a:rPr sz="1050">
+                          <a:solidFill>
+                            <a:srgbClr val="25342A"/>
+                          </a:solidFill>
+                        </a:rPr>
+                        <a:t>-</a:t>
                       </a:r>
                     </a:p>
                   </a:txBody>
@@ -18146,7 +18146,7 @@
                             <a:srgbClr val="25342A"/>
                           </a:solidFill>
                         </a:rPr>
-                        <a:t>Vehicles and fuel</a:t>
+                        <a:t>Marketing</a:t>
                       </a:r>
                     </a:p>
                   </a:txBody>
@@ -18168,7 +18168,7 @@
                             <a:srgbClr val="B42318"/>
                           </a:solidFill>
                         </a:rPr>
-                        <a:t>(8,300)</a:t>
+                        <a:t>(7,600)</a:t>
                       </a:r>
                     </a:p>
                   </a:txBody>
@@ -18190,29 +18190,29 @@
                             <a:srgbClr val="B42318"/>
                           </a:solidFill>
                         </a:rPr>
-                        <a:t>(7,900)</a:t>
-                      </a:r>
-                    </a:p>
-                  </a:txBody>
-                  <a:tcPr>
-                    <a:solidFill>
-                      <a:srgbClr val="F7FAF7"/>
-                    </a:solidFill>
-                  </a:tcPr>
-                </a:tc>
-                <a:tc>
-                  <a:txBody>
-                    <a:bodyPr/>
-                    <a:lstStyle/>
-                    <a:p>
-                      <a:pPr algn="r"/>
-                      <a:r>
-                        <a:rPr sz="1050">
-                          <a:solidFill>
-                            <a:srgbClr val="B42318"/>
-                          </a:solidFill>
-                        </a:rPr>
-                        <a:t>(400)</a:t>
+                        <a:t>(8,400)</a:t>
+                      </a:r>
+                    </a:p>
+                  </a:txBody>
+                  <a:tcPr>
+                    <a:solidFill>
+                      <a:srgbClr val="F7FAF7"/>
+                    </a:solidFill>
+                  </a:tcPr>
+                </a:tc>
+                <a:tc>
+                  <a:txBody>
+                    <a:bodyPr/>
+                    <a:lstStyle/>
+                    <a:p>
+                      <a:pPr algn="r"/>
+                      <a:r>
+                        <a:rPr sz="1050">
+                          <a:solidFill>
+                            <a:srgbClr val="25342A"/>
+                          </a:solidFill>
+                        </a:rPr>
+                        <a:t>800</a:t>
                       </a:r>
                     </a:p>
                   </a:txBody>
@@ -18235,7 +18235,7 @@
                             <a:srgbClr val="25342A"/>
                           </a:solidFill>
                         </a:rPr>
-                        <a:t>Rent and occupancy</a:t>
+                        <a:t>Vehicles and fuel</a:t>
                       </a:r>
                     </a:p>
                   </a:txBody>
@@ -18257,7 +18257,7 @@
                             <a:srgbClr val="B42318"/>
                           </a:solidFill>
                         </a:rPr>
-                        <a:t>(7,000)</a:t>
+                        <a:t>(8,300)</a:t>
                       </a:r>
                     </a:p>
                   </a:txBody>
@@ -18279,29 +18279,29 @@
                             <a:srgbClr val="B42318"/>
                           </a:solidFill>
                         </a:rPr>
-                        <a:t>(7,000)</a:t>
-                      </a:r>
-                    </a:p>
-                  </a:txBody>
-                  <a:tcPr>
-                    <a:solidFill>
-                      <a:srgbClr val="FFFFFF"/>
-                    </a:solidFill>
-                  </a:tcPr>
-                </a:tc>
-                <a:tc>
-                  <a:txBody>
-                    <a:bodyPr/>
-                    <a:lstStyle/>
-                    <a:p>
-                      <a:pPr algn="r"/>
-                      <a:r>
-                        <a:rPr sz="1050">
-                          <a:solidFill>
-                            <a:srgbClr val="25342A"/>
-                          </a:solidFill>
-                        </a:rPr>
-                        <a:t>-</a:t>
+                        <a:t>(7,900)</a:t>
+                      </a:r>
+                    </a:p>
+                  </a:txBody>
+                  <a:tcPr>
+                    <a:solidFill>
+                      <a:srgbClr val="FFFFFF"/>
+                    </a:solidFill>
+                  </a:tcPr>
+                </a:tc>
+                <a:tc>
+                  <a:txBody>
+                    <a:bodyPr/>
+                    <a:lstStyle/>
+                    <a:p>
+                      <a:pPr algn="r"/>
+                      <a:r>
+                        <a:rPr sz="1050">
+                          <a:solidFill>
+                            <a:srgbClr val="B42318"/>
+                          </a:solidFill>
+                        </a:rPr>
+                        <a:t>(400)</a:t>
                       </a:r>
                     </a:p>
                   </a:txBody>
@@ -18324,7 +18324,7 @@
                             <a:srgbClr val="25342A"/>
                           </a:solidFill>
                         </a:rPr>
-                        <a:t>Insurance</a:t>
+                        <a:t>Rent and occupancy</a:t>
                       </a:r>
                     </a:p>
                   </a:txBody>
@@ -18346,7 +18346,7 @@
                             <a:srgbClr val="B42318"/>
                           </a:solidFill>
                         </a:rPr>
-                        <a:t>(3,000)</a:t>
+                        <a:t>(7,000)</a:t>
                       </a:r>
                     </a:p>
                   </a:txBody>
@@ -18368,7 +18368,7 @@
                             <a:srgbClr val="B42318"/>
                           </a:solidFill>
                         </a:rPr>
-                        <a:t>(3,000)</a:t>
+                        <a:t>(7,000)</a:t>
                       </a:r>
                     </a:p>
                   </a:txBody>
@@ -18648,7 +18648,7 @@
         </p:nvGraphicFramePr>
         <p:xfrm>
           <a:off x="457200" y="1188720"/>
-          <a:ext cx="11247120" cy="3291840"/>
+          <a:ext cx="11247120" cy="3621024"/>
         </p:xfrm>
         <a:graphic>
           <a:graphicData uri="http://schemas.openxmlformats.org/drawingml/2006/table">
@@ -18763,7 +18763,7 @@
                             <a:srgbClr val="25342A"/>
                           </a:solidFill>
                         </a:rPr>
-                        <a:t>IT and software</a:t>
+                        <a:t>Insurance</a:t>
                       </a:r>
                     </a:p>
                   </a:txBody>
@@ -18785,7 +18785,7 @@
                             <a:srgbClr val="B42318"/>
                           </a:solidFill>
                         </a:rPr>
-                        <a:t>(2,300)</a:t>
+                        <a:t>(3,000)</a:t>
                       </a:r>
                     </a:p>
                   </a:txBody>
@@ -18807,7 +18807,7 @@
                             <a:srgbClr val="B42318"/>
                           </a:solidFill>
                         </a:rPr>
-                        <a:t>(2,300)</a:t>
+                        <a:t>(3,000)</a:t>
                       </a:r>
                     </a:p>
                   </a:txBody>
@@ -18852,7 +18852,7 @@
                             <a:srgbClr val="25342A"/>
                           </a:solidFill>
                         </a:rPr>
-                        <a:t>Other overheads</a:t>
+                        <a:t>IT and software</a:t>
                       </a:r>
                     </a:p>
                   </a:txBody>
@@ -18874,7 +18874,7 @@
                             <a:srgbClr val="B42318"/>
                           </a:solidFill>
                         </a:rPr>
-                        <a:t>(3,900)</a:t>
+                        <a:t>(2,300)</a:t>
                       </a:r>
                     </a:p>
                   </a:txBody>
@@ -18896,29 +18896,29 @@
                             <a:srgbClr val="B42318"/>
                           </a:solidFill>
                         </a:rPr>
-                        <a:t>(3,600)</a:t>
-                      </a:r>
-                    </a:p>
-                  </a:txBody>
-                  <a:tcPr>
-                    <a:solidFill>
-                      <a:srgbClr val="F7FAF7"/>
-                    </a:solidFill>
-                  </a:tcPr>
-                </a:tc>
-                <a:tc>
-                  <a:txBody>
-                    <a:bodyPr/>
-                    <a:lstStyle/>
-                    <a:p>
-                      <a:pPr algn="r"/>
-                      <a:r>
-                        <a:rPr sz="1050">
-                          <a:solidFill>
-                            <a:srgbClr val="B42318"/>
-                          </a:solidFill>
-                        </a:rPr>
-                        <a:t>(300)</a:t>
+                        <a:t>(2,300)</a:t>
+                      </a:r>
+                    </a:p>
+                  </a:txBody>
+                  <a:tcPr>
+                    <a:solidFill>
+                      <a:srgbClr val="F7FAF7"/>
+                    </a:solidFill>
+                  </a:tcPr>
+                </a:tc>
+                <a:tc>
+                  <a:txBody>
+                    <a:bodyPr/>
+                    <a:lstStyle/>
+                    <a:p>
+                      <a:pPr algn="r"/>
+                      <a:r>
+                        <a:rPr sz="1050">
+                          <a:solidFill>
+                            <a:srgbClr val="25342A"/>
+                          </a:solidFill>
+                        </a:rPr>
+                        <a:t>-</a:t>
                       </a:r>
                     </a:p>
                   </a:txBody>
@@ -18936,78 +18936,78 @@
                     <a:lstStyle/>
                     <a:p>
                       <a:r>
-                        <a:rPr sz="1050" b="1">
-                          <a:solidFill>
-                            <a:srgbClr val="25342A"/>
-                          </a:solidFill>
-                        </a:rPr>
-                        <a:t>Total operating expenses</a:t>
-                      </a:r>
-                    </a:p>
-                  </a:txBody>
-                  <a:tcPr>
-                    <a:solidFill>
-                      <a:srgbClr val="FFFFFF"/>
-                    </a:solidFill>
-                  </a:tcPr>
-                </a:tc>
-                <a:tc>
-                  <a:txBody>
-                    <a:bodyPr/>
-                    <a:lstStyle/>
-                    <a:p>
-                      <a:pPr algn="r"/>
-                      <a:r>
-                        <a:rPr sz="1050" b="1">
+                        <a:rPr sz="1050">
+                          <a:solidFill>
+                            <a:srgbClr val="25342A"/>
+                          </a:solidFill>
+                        </a:rPr>
+                        <a:t>Other overheads</a:t>
+                      </a:r>
+                    </a:p>
+                  </a:txBody>
+                  <a:tcPr>
+                    <a:solidFill>
+                      <a:srgbClr val="FFFFFF"/>
+                    </a:solidFill>
+                  </a:tcPr>
+                </a:tc>
+                <a:tc>
+                  <a:txBody>
+                    <a:bodyPr/>
+                    <a:lstStyle/>
+                    <a:p>
+                      <a:pPr algn="r"/>
+                      <a:r>
+                        <a:rPr sz="1050">
                           <a:solidFill>
                             <a:srgbClr val="B42318"/>
                           </a:solidFill>
                         </a:rPr>
-                        <a:t>(54,000)</a:t>
-                      </a:r>
-                    </a:p>
-                  </a:txBody>
-                  <a:tcPr>
-                    <a:solidFill>
-                      <a:srgbClr val="FFFFFF"/>
-                    </a:solidFill>
-                  </a:tcPr>
-                </a:tc>
-                <a:tc>
-                  <a:txBody>
-                    <a:bodyPr/>
-                    <a:lstStyle/>
-                    <a:p>
-                      <a:pPr algn="r"/>
-                      <a:r>
-                        <a:rPr sz="1050" b="1">
+                        <a:t>(3,900)</a:t>
+                      </a:r>
+                    </a:p>
+                  </a:txBody>
+                  <a:tcPr>
+                    <a:solidFill>
+                      <a:srgbClr val="FFFFFF"/>
+                    </a:solidFill>
+                  </a:tcPr>
+                </a:tc>
+                <a:tc>
+                  <a:txBody>
+                    <a:bodyPr/>
+                    <a:lstStyle/>
+                    <a:p>
+                      <a:pPr algn="r"/>
+                      <a:r>
+                        <a:rPr sz="1050">
                           <a:solidFill>
                             <a:srgbClr val="B42318"/>
                           </a:solidFill>
                         </a:rPr>
-                        <a:t>(54,100)</a:t>
-                      </a:r>
-                    </a:p>
-                  </a:txBody>
-                  <a:tcPr>
-                    <a:solidFill>
-                      <a:srgbClr val="FFFFFF"/>
-                    </a:solidFill>
-                  </a:tcPr>
-                </a:tc>
-                <a:tc>
-                  <a:txBody>
-                    <a:bodyPr/>
-                    <a:lstStyle/>
-                    <a:p>
-                      <a:pPr algn="r"/>
-                      <a:r>
-                        <a:rPr sz="1050" b="1">
-                          <a:solidFill>
-                            <a:srgbClr val="25342A"/>
-                          </a:solidFill>
-                        </a:rPr>
-                        <a:t>100</a:t>
+                        <a:t>(3,600)</a:t>
+                      </a:r>
+                    </a:p>
+                  </a:txBody>
+                  <a:tcPr>
+                    <a:solidFill>
+                      <a:srgbClr val="FFFFFF"/>
+                    </a:solidFill>
+                  </a:tcPr>
+                </a:tc>
+                <a:tc>
+                  <a:txBody>
+                    <a:bodyPr/>
+                    <a:lstStyle/>
+                    <a:p>
+                      <a:pPr algn="r"/>
+                      <a:r>
+                        <a:rPr sz="1050">
+                          <a:solidFill>
+                            <a:srgbClr val="B42318"/>
+                          </a:solidFill>
+                        </a:rPr>
+                        <a:t>(300)</a:t>
                       </a:r>
                     </a:p>
                   </a:txBody>
@@ -19025,78 +19025,78 @@
                     <a:lstStyle/>
                     <a:p>
                       <a:r>
-                        <a:rPr sz="1050">
-                          <a:solidFill>
-                            <a:srgbClr val="25342A"/>
-                          </a:solidFill>
-                        </a:rPr>
-                        <a:t>EBITDA</a:t>
-                      </a:r>
-                    </a:p>
-                  </a:txBody>
-                  <a:tcPr>
-                    <a:solidFill>
-                      <a:srgbClr val="F7FAF7"/>
-                    </a:solidFill>
-                  </a:tcPr>
-                </a:tc>
-                <a:tc>
-                  <a:txBody>
-                    <a:bodyPr/>
-                    <a:lstStyle/>
-                    <a:p>
-                      <a:pPr algn="r"/>
-                      <a:r>
-                        <a:rPr sz="1050">
-                          <a:solidFill>
-                            <a:srgbClr val="25342A"/>
-                          </a:solidFill>
-                        </a:rPr>
-                        <a:t>15,677</a:t>
-                      </a:r>
-                    </a:p>
-                  </a:txBody>
-                  <a:tcPr>
-                    <a:solidFill>
-                      <a:srgbClr val="F7FAF7"/>
-                    </a:solidFill>
-                  </a:tcPr>
-                </a:tc>
-                <a:tc>
-                  <a:txBody>
-                    <a:bodyPr/>
-                    <a:lstStyle/>
-                    <a:p>
-                      <a:pPr algn="r"/>
-                      <a:r>
-                        <a:rPr sz="1050">
-                          <a:solidFill>
-                            <a:srgbClr val="25342A"/>
-                          </a:solidFill>
-                        </a:rPr>
-                        <a:t>9,477</a:t>
-                      </a:r>
-                    </a:p>
-                  </a:txBody>
-                  <a:tcPr>
-                    <a:solidFill>
-                      <a:srgbClr val="F7FAF7"/>
-                    </a:solidFill>
-                  </a:tcPr>
-                </a:tc>
-                <a:tc>
-                  <a:txBody>
-                    <a:bodyPr/>
-                    <a:lstStyle/>
-                    <a:p>
-                      <a:pPr algn="r"/>
-                      <a:r>
-                        <a:rPr sz="1050">
-                          <a:solidFill>
-                            <a:srgbClr val="25342A"/>
-                          </a:solidFill>
-                        </a:rPr>
-                        <a:t>6,200</a:t>
+                        <a:rPr sz="1050" b="1">
+                          <a:solidFill>
+                            <a:srgbClr val="25342A"/>
+                          </a:solidFill>
+                        </a:rPr>
+                        <a:t>Total operating expenses</a:t>
+                      </a:r>
+                    </a:p>
+                  </a:txBody>
+                  <a:tcPr>
+                    <a:solidFill>
+                      <a:srgbClr val="F7FAF7"/>
+                    </a:solidFill>
+                  </a:tcPr>
+                </a:tc>
+                <a:tc>
+                  <a:txBody>
+                    <a:bodyPr/>
+                    <a:lstStyle/>
+                    <a:p>
+                      <a:pPr algn="r"/>
+                      <a:r>
+                        <a:rPr sz="1050" b="1">
+                          <a:solidFill>
+                            <a:srgbClr val="B42318"/>
+                          </a:solidFill>
+                        </a:rPr>
+                        <a:t>(54,000)</a:t>
+                      </a:r>
+                    </a:p>
+                  </a:txBody>
+                  <a:tcPr>
+                    <a:solidFill>
+                      <a:srgbClr val="F7FAF7"/>
+                    </a:solidFill>
+                  </a:tcPr>
+                </a:tc>
+                <a:tc>
+                  <a:txBody>
+                    <a:bodyPr/>
+                    <a:lstStyle/>
+                    <a:p>
+                      <a:pPr algn="r"/>
+                      <a:r>
+                        <a:rPr sz="1050" b="1">
+                          <a:solidFill>
+                            <a:srgbClr val="B42318"/>
+                          </a:solidFill>
+                        </a:rPr>
+                        <a:t>(54,100)</a:t>
+                      </a:r>
+                    </a:p>
+                  </a:txBody>
+                  <a:tcPr>
+                    <a:solidFill>
+                      <a:srgbClr val="F7FAF7"/>
+                    </a:solidFill>
+                  </a:tcPr>
+                </a:tc>
+                <a:tc>
+                  <a:txBody>
+                    <a:bodyPr/>
+                    <a:lstStyle/>
+                    <a:p>
+                      <a:pPr algn="r"/>
+                      <a:r>
+                        <a:rPr sz="1050" b="1">
+                          <a:solidFill>
+                            <a:srgbClr val="25342A"/>
+                          </a:solidFill>
+                        </a:rPr>
+                        <a:t>100</a:t>
                       </a:r>
                     </a:p>
                   </a:txBody>
@@ -19119,73 +19119,73 @@
                             <a:srgbClr val="25342A"/>
                           </a:solidFill>
                         </a:rPr>
-                        <a:t>Depreciation</a:t>
-                      </a:r>
-                    </a:p>
-                  </a:txBody>
-                  <a:tcPr>
-                    <a:solidFill>
-                      <a:srgbClr val="FFFFFF"/>
-                    </a:solidFill>
-                  </a:tcPr>
-                </a:tc>
-                <a:tc>
-                  <a:txBody>
-                    <a:bodyPr/>
-                    <a:lstStyle/>
-                    <a:p>
-                      <a:pPr algn="r"/>
-                      <a:r>
-                        <a:rPr sz="1050">
-                          <a:solidFill>
-                            <a:srgbClr val="B42318"/>
-                          </a:solidFill>
-                        </a:rPr>
-                        <a:t>(4,500)</a:t>
-                      </a:r>
-                    </a:p>
-                  </a:txBody>
-                  <a:tcPr>
-                    <a:solidFill>
-                      <a:srgbClr val="FFFFFF"/>
-                    </a:solidFill>
-                  </a:tcPr>
-                </a:tc>
-                <a:tc>
-                  <a:txBody>
-                    <a:bodyPr/>
-                    <a:lstStyle/>
-                    <a:p>
-                      <a:pPr algn="r"/>
-                      <a:r>
-                        <a:rPr sz="1050">
-                          <a:solidFill>
-                            <a:srgbClr val="B42318"/>
-                          </a:solidFill>
-                        </a:rPr>
-                        <a:t>(4,300)</a:t>
-                      </a:r>
-                    </a:p>
-                  </a:txBody>
-                  <a:tcPr>
-                    <a:solidFill>
-                      <a:srgbClr val="FFFFFF"/>
-                    </a:solidFill>
-                  </a:tcPr>
-                </a:tc>
-                <a:tc>
-                  <a:txBody>
-                    <a:bodyPr/>
-                    <a:lstStyle/>
-                    <a:p>
-                      <a:pPr algn="r"/>
-                      <a:r>
-                        <a:rPr sz="1050">
-                          <a:solidFill>
-                            <a:srgbClr val="B42318"/>
-                          </a:solidFill>
-                        </a:rPr>
-                        <a:t>(200)</a:t>
+                        <a:t>EBITDA</a:t>
+                      </a:r>
+                    </a:p>
+                  </a:txBody>
+                  <a:tcPr>
+                    <a:solidFill>
+                      <a:srgbClr val="FFFFFF"/>
+                    </a:solidFill>
+                  </a:tcPr>
+                </a:tc>
+                <a:tc>
+                  <a:txBody>
+                    <a:bodyPr/>
+                    <a:lstStyle/>
+                    <a:p>
+                      <a:pPr algn="r"/>
+                      <a:r>
+                        <a:rPr sz="1050">
+                          <a:solidFill>
+                            <a:srgbClr val="25342A"/>
+                          </a:solidFill>
+                        </a:rPr>
+                        <a:t>15,677</a:t>
+                      </a:r>
+                    </a:p>
+                  </a:txBody>
+                  <a:tcPr>
+                    <a:solidFill>
+                      <a:srgbClr val="FFFFFF"/>
+                    </a:solidFill>
+                  </a:tcPr>
+                </a:tc>
+                <a:tc>
+                  <a:txBody>
+                    <a:bodyPr/>
+                    <a:lstStyle/>
+                    <a:p>
+                      <a:pPr algn="r"/>
+                      <a:r>
+                        <a:rPr sz="1050">
+                          <a:solidFill>
+                            <a:srgbClr val="25342A"/>
+                          </a:solidFill>
+                        </a:rPr>
+                        <a:t>9,477</a:t>
+                      </a:r>
+                    </a:p>
+                  </a:txBody>
+                  <a:tcPr>
+                    <a:solidFill>
+                      <a:srgbClr val="FFFFFF"/>
+                    </a:solidFill>
+                  </a:tcPr>
+                </a:tc>
+                <a:tc>
+                  <a:txBody>
+                    <a:bodyPr/>
+                    <a:lstStyle/>
+                    <a:p>
+                      <a:pPr algn="r"/>
+                      <a:r>
+                        <a:rPr sz="1050">
+                          <a:solidFill>
+                            <a:srgbClr val="25342A"/>
+                          </a:solidFill>
+                        </a:rPr>
+                        <a:t>6,200</a:t>
                       </a:r>
                     </a:p>
                   </a:txBody>
@@ -19208,7 +19208,7 @@
                             <a:srgbClr val="25342A"/>
                           </a:solidFill>
                         </a:rPr>
-                        <a:t>Interest</a:t>
+                        <a:t>Depreciation</a:t>
                       </a:r>
                     </a:p>
                   </a:txBody>
@@ -19230,7 +19230,7 @@
                             <a:srgbClr val="B42318"/>
                           </a:solidFill>
                         </a:rPr>
-                        <a:t>(1,080)</a:t>
+                        <a:t>(4,500)</a:t>
                       </a:r>
                     </a:p>
                   </a:txBody>
@@ -19252,29 +19252,29 @@
                             <a:srgbClr val="B42318"/>
                           </a:solidFill>
                         </a:rPr>
-                        <a:t>(1,100)</a:t>
-                      </a:r>
-                    </a:p>
-                  </a:txBody>
-                  <a:tcPr>
-                    <a:solidFill>
-                      <a:srgbClr val="F7FAF7"/>
-                    </a:solidFill>
-                  </a:tcPr>
-                </a:tc>
-                <a:tc>
-                  <a:txBody>
-                    <a:bodyPr/>
-                    <a:lstStyle/>
-                    <a:p>
-                      <a:pPr algn="r"/>
-                      <a:r>
-                        <a:rPr sz="1050">
-                          <a:solidFill>
-                            <a:srgbClr val="25342A"/>
-                          </a:solidFill>
-                        </a:rPr>
-                        <a:t>20</a:t>
+                        <a:t>(4,300)</a:t>
+                      </a:r>
+                    </a:p>
+                  </a:txBody>
+                  <a:tcPr>
+                    <a:solidFill>
+                      <a:srgbClr val="F7FAF7"/>
+                    </a:solidFill>
+                  </a:tcPr>
+                </a:tc>
+                <a:tc>
+                  <a:txBody>
+                    <a:bodyPr/>
+                    <a:lstStyle/>
+                    <a:p>
+                      <a:pPr algn="r"/>
+                      <a:r>
+                        <a:rPr sz="1050">
+                          <a:solidFill>
+                            <a:srgbClr val="B42318"/>
+                          </a:solidFill>
+                        </a:rPr>
+                        <a:t>(200)</a:t>
                       </a:r>
                     </a:p>
                   </a:txBody>
@@ -19297,73 +19297,73 @@
                             <a:srgbClr val="25342A"/>
                           </a:solidFill>
                         </a:rPr>
-                        <a:t>Profit before tax</a:t>
-                      </a:r>
-                    </a:p>
-                  </a:txBody>
-                  <a:tcPr>
-                    <a:solidFill>
-                      <a:srgbClr val="FFFFFF"/>
-                    </a:solidFill>
-                  </a:tcPr>
-                </a:tc>
-                <a:tc>
-                  <a:txBody>
-                    <a:bodyPr/>
-                    <a:lstStyle/>
-                    <a:p>
-                      <a:pPr algn="r"/>
-                      <a:r>
-                        <a:rPr sz="1050">
-                          <a:solidFill>
-                            <a:srgbClr val="25342A"/>
-                          </a:solidFill>
-                        </a:rPr>
-                        <a:t>10,097</a:t>
-                      </a:r>
-                    </a:p>
-                  </a:txBody>
-                  <a:tcPr>
-                    <a:solidFill>
-                      <a:srgbClr val="FFFFFF"/>
-                    </a:solidFill>
-                  </a:tcPr>
-                </a:tc>
-                <a:tc>
-                  <a:txBody>
-                    <a:bodyPr/>
-                    <a:lstStyle/>
-                    <a:p>
-                      <a:pPr algn="r"/>
-                      <a:r>
-                        <a:rPr sz="1050">
-                          <a:solidFill>
-                            <a:srgbClr val="25342A"/>
-                          </a:solidFill>
-                        </a:rPr>
-                        <a:t>4,077</a:t>
-                      </a:r>
-                    </a:p>
-                  </a:txBody>
-                  <a:tcPr>
-                    <a:solidFill>
-                      <a:srgbClr val="FFFFFF"/>
-                    </a:solidFill>
-                  </a:tcPr>
-                </a:tc>
-                <a:tc>
-                  <a:txBody>
-                    <a:bodyPr/>
-                    <a:lstStyle/>
-                    <a:p>
-                      <a:pPr algn="r"/>
-                      <a:r>
-                        <a:rPr sz="1050">
-                          <a:solidFill>
-                            <a:srgbClr val="25342A"/>
-                          </a:solidFill>
-                        </a:rPr>
-                        <a:t>6,020</a:t>
+                        <a:t>Interest</a:t>
+                      </a:r>
+                    </a:p>
+                  </a:txBody>
+                  <a:tcPr>
+                    <a:solidFill>
+                      <a:srgbClr val="FFFFFF"/>
+                    </a:solidFill>
+                  </a:tcPr>
+                </a:tc>
+                <a:tc>
+                  <a:txBody>
+                    <a:bodyPr/>
+                    <a:lstStyle/>
+                    <a:p>
+                      <a:pPr algn="r"/>
+                      <a:r>
+                        <a:rPr sz="1050">
+                          <a:solidFill>
+                            <a:srgbClr val="B42318"/>
+                          </a:solidFill>
+                        </a:rPr>
+                        <a:t>(1,080)</a:t>
+                      </a:r>
+                    </a:p>
+                  </a:txBody>
+                  <a:tcPr>
+                    <a:solidFill>
+                      <a:srgbClr val="FFFFFF"/>
+                    </a:solidFill>
+                  </a:tcPr>
+                </a:tc>
+                <a:tc>
+                  <a:txBody>
+                    <a:bodyPr/>
+                    <a:lstStyle/>
+                    <a:p>
+                      <a:pPr algn="r"/>
+                      <a:r>
+                        <a:rPr sz="1050">
+                          <a:solidFill>
+                            <a:srgbClr val="B42318"/>
+                          </a:solidFill>
+                        </a:rPr>
+                        <a:t>(1,100)</a:t>
+                      </a:r>
+                    </a:p>
+                  </a:txBody>
+                  <a:tcPr>
+                    <a:solidFill>
+                      <a:srgbClr val="FFFFFF"/>
+                    </a:solidFill>
+                  </a:tcPr>
+                </a:tc>
+                <a:tc>
+                  <a:txBody>
+                    <a:bodyPr/>
+                    <a:lstStyle/>
+                    <a:p>
+                      <a:pPr algn="r"/>
+                      <a:r>
+                        <a:rPr sz="1050">
+                          <a:solidFill>
+                            <a:srgbClr val="25342A"/>
+                          </a:solidFill>
+                        </a:rPr>
+                        <a:t>20</a:t>
                       </a:r>
                     </a:p>
                   </a:txBody>
@@ -19386,73 +19386,73 @@
                             <a:srgbClr val="25342A"/>
                           </a:solidFill>
                         </a:rPr>
-                        <a:t>Income tax provision (25%)</a:t>
-                      </a:r>
-                    </a:p>
-                  </a:txBody>
-                  <a:tcPr>
-                    <a:solidFill>
-                      <a:srgbClr val="F7FAF7"/>
-                    </a:solidFill>
-                  </a:tcPr>
-                </a:tc>
-                <a:tc>
-                  <a:txBody>
-                    <a:bodyPr/>
-                    <a:lstStyle/>
-                    <a:p>
-                      <a:pPr algn="r"/>
-                      <a:r>
-                        <a:rPr sz="1050">
-                          <a:solidFill>
-                            <a:srgbClr val="B42318"/>
-                          </a:solidFill>
-                        </a:rPr>
-                        <a:t>(2,524)</a:t>
-                      </a:r>
-                    </a:p>
-                  </a:txBody>
-                  <a:tcPr>
-                    <a:solidFill>
-                      <a:srgbClr val="F7FAF7"/>
-                    </a:solidFill>
-                  </a:tcPr>
-                </a:tc>
-                <a:tc>
-                  <a:txBody>
-                    <a:bodyPr/>
-                    <a:lstStyle/>
-                    <a:p>
-                      <a:pPr algn="r"/>
-                      <a:r>
-                        <a:rPr sz="1050">
-                          <a:solidFill>
-                            <a:srgbClr val="B42318"/>
-                          </a:solidFill>
-                        </a:rPr>
-                        <a:t>(1,019)</a:t>
-                      </a:r>
-                    </a:p>
-                  </a:txBody>
-                  <a:tcPr>
-                    <a:solidFill>
-                      <a:srgbClr val="F7FAF7"/>
-                    </a:solidFill>
-                  </a:tcPr>
-                </a:tc>
-                <a:tc>
-                  <a:txBody>
-                    <a:bodyPr/>
-                    <a:lstStyle/>
-                    <a:p>
-                      <a:pPr algn="r"/>
-                      <a:r>
-                        <a:rPr sz="1050">
-                          <a:solidFill>
-                            <a:srgbClr val="B42318"/>
-                          </a:solidFill>
-                        </a:rPr>
-                        <a:t>(1,505)</a:t>
+                        <a:t>Profit before tax</a:t>
+                      </a:r>
+                    </a:p>
+                  </a:txBody>
+                  <a:tcPr>
+                    <a:solidFill>
+                      <a:srgbClr val="F7FAF7"/>
+                    </a:solidFill>
+                  </a:tcPr>
+                </a:tc>
+                <a:tc>
+                  <a:txBody>
+                    <a:bodyPr/>
+                    <a:lstStyle/>
+                    <a:p>
+                      <a:pPr algn="r"/>
+                      <a:r>
+                        <a:rPr sz="1050">
+                          <a:solidFill>
+                            <a:srgbClr val="25342A"/>
+                          </a:solidFill>
+                        </a:rPr>
+                        <a:t>10,097</a:t>
+                      </a:r>
+                    </a:p>
+                  </a:txBody>
+                  <a:tcPr>
+                    <a:solidFill>
+                      <a:srgbClr val="F7FAF7"/>
+                    </a:solidFill>
+                  </a:tcPr>
+                </a:tc>
+                <a:tc>
+                  <a:txBody>
+                    <a:bodyPr/>
+                    <a:lstStyle/>
+                    <a:p>
+                      <a:pPr algn="r"/>
+                      <a:r>
+                        <a:rPr sz="1050">
+                          <a:solidFill>
+                            <a:srgbClr val="25342A"/>
+                          </a:solidFill>
+                        </a:rPr>
+                        <a:t>4,077</a:t>
+                      </a:r>
+                    </a:p>
+                  </a:txBody>
+                  <a:tcPr>
+                    <a:solidFill>
+                      <a:srgbClr val="F7FAF7"/>
+                    </a:solidFill>
+                  </a:tcPr>
+                </a:tc>
+                <a:tc>
+                  <a:txBody>
+                    <a:bodyPr/>
+                    <a:lstStyle/>
+                    <a:p>
+                      <a:pPr algn="r"/>
+                      <a:r>
+                        <a:rPr sz="1050">
+                          <a:solidFill>
+                            <a:srgbClr val="25342A"/>
+                          </a:solidFill>
+                        </a:rPr>
+                        <a:t>6,020</a:t>
                       </a:r>
                     </a:p>
                   </a:txBody>
@@ -19470,6 +19470,95 @@
                     <a:lstStyle/>
                     <a:p>
                       <a:r>
+                        <a:rPr sz="1050">
+                          <a:solidFill>
+                            <a:srgbClr val="25342A"/>
+                          </a:solidFill>
+                        </a:rPr>
+                        <a:t>Income tax provision (25%)</a:t>
+                      </a:r>
+                    </a:p>
+                  </a:txBody>
+                  <a:tcPr>
+                    <a:solidFill>
+                      <a:srgbClr val="FFFFFF"/>
+                    </a:solidFill>
+                  </a:tcPr>
+                </a:tc>
+                <a:tc>
+                  <a:txBody>
+                    <a:bodyPr/>
+                    <a:lstStyle/>
+                    <a:p>
+                      <a:pPr algn="r"/>
+                      <a:r>
+                        <a:rPr sz="1050">
+                          <a:solidFill>
+                            <a:srgbClr val="B42318"/>
+                          </a:solidFill>
+                        </a:rPr>
+                        <a:t>(2,524)</a:t>
+                      </a:r>
+                    </a:p>
+                  </a:txBody>
+                  <a:tcPr>
+                    <a:solidFill>
+                      <a:srgbClr val="FFFFFF"/>
+                    </a:solidFill>
+                  </a:tcPr>
+                </a:tc>
+                <a:tc>
+                  <a:txBody>
+                    <a:bodyPr/>
+                    <a:lstStyle/>
+                    <a:p>
+                      <a:pPr algn="r"/>
+                      <a:r>
+                        <a:rPr sz="1050">
+                          <a:solidFill>
+                            <a:srgbClr val="B42318"/>
+                          </a:solidFill>
+                        </a:rPr>
+                        <a:t>(1,019)</a:t>
+                      </a:r>
+                    </a:p>
+                  </a:txBody>
+                  <a:tcPr>
+                    <a:solidFill>
+                      <a:srgbClr val="FFFFFF"/>
+                    </a:solidFill>
+                  </a:tcPr>
+                </a:tc>
+                <a:tc>
+                  <a:txBody>
+                    <a:bodyPr/>
+                    <a:lstStyle/>
+                    <a:p>
+                      <a:pPr algn="r"/>
+                      <a:r>
+                        <a:rPr sz="1050">
+                          <a:solidFill>
+                            <a:srgbClr val="B42318"/>
+                          </a:solidFill>
+                        </a:rPr>
+                        <a:t>(1,505)</a:t>
+                      </a:r>
+                    </a:p>
+                  </a:txBody>
+                  <a:tcPr>
+                    <a:solidFill>
+                      <a:srgbClr val="FFFFFF"/>
+                    </a:solidFill>
+                  </a:tcPr>
+                </a:tc>
+              </a:tr>
+              <a:tr h="329184">
+                <a:tc>
+                  <a:txBody>
+                    <a:bodyPr/>
+                    <a:lstStyle/>
+                    <a:p>
+                      <a:r>
                         <a:rPr sz="1050" b="1">
                           <a:solidFill>
                             <a:srgbClr val="25342A"/>
@@ -19481,7 +19570,7 @@
                   </a:txBody>
                   <a:tcPr>
                     <a:solidFill>
-                      <a:srgbClr val="FFFFFF"/>
+                      <a:srgbClr val="F7FAF7"/>
                     </a:solidFill>
                   </a:tcPr>
                 </a:tc>
@@ -19503,7 +19592,7 @@
                   </a:txBody>
                   <a:tcPr>
                     <a:solidFill>
-                      <a:srgbClr val="FFFFFF"/>
+                      <a:srgbClr val="F7FAF7"/>
                     </a:solidFill>
                   </a:tcPr>
                 </a:tc>
@@ -19525,7 +19614,7 @@
                   </a:txBody>
                   <a:tcPr>
                     <a:solidFill>
-                      <a:srgbClr val="FFFFFF"/>
+                      <a:srgbClr val="F7FAF7"/>
                     </a:solidFill>
                   </a:tcPr>
                 </a:tc>
@@ -19547,7 +19636,7 @@
                   </a:txBody>
                   <a:tcPr>
                     <a:solidFill>
-                      <a:srgbClr val="FFFFFF"/>
+                      <a:srgbClr val="F7FAF7"/>
                     </a:solidFill>
                   </a:tcPr>
                 </a:tc>

--- a/media/exports/trades-sample-statements.pptx
+++ b/media/exports/trades-sample-statements.pptx
@@ -149,7 +149,7 @@
             <c:idx val="0"/>
             <c:spPr>
               <a:solidFill>
-                <a:srgbClr val="A7B0B8"/>
+                <a:srgbClr val="7D8790"/>
               </a:solidFill>
             </c:spPr>
           </c:dPt>
@@ -157,7 +157,7 @@
             <c:idx val="1"/>
             <c:spPr>
               <a:solidFill>
-                <a:srgbClr val="A7B0B8"/>
+                <a:srgbClr val="7D8790"/>
               </a:solidFill>
             </c:spPr>
           </c:dPt>
@@ -165,7 +165,7 @@
             <c:idx val="2"/>
             <c:spPr>
               <a:solidFill>
-                <a:srgbClr val="A7B0B8"/>
+                <a:srgbClr val="7D8790"/>
               </a:solidFill>
             </c:spPr>
           </c:dPt>
@@ -361,7 +361,7 @@
             <c:idx val="0"/>
             <c:spPr>
               <a:solidFill>
-                <a:srgbClr val="A7B0B8"/>
+                <a:srgbClr val="7D8790"/>
               </a:solidFill>
             </c:spPr>
           </c:dPt>
@@ -369,7 +369,7 @@
             <c:idx val="1"/>
             <c:spPr>
               <a:solidFill>
-                <a:srgbClr val="A7B0B8"/>
+                <a:srgbClr val="7D8790"/>
               </a:solidFill>
             </c:spPr>
           </c:dPt>
@@ -377,7 +377,7 @@
             <c:idx val="2"/>
             <c:spPr>
               <a:solidFill>
-                <a:srgbClr val="A7B0B8"/>
+                <a:srgbClr val="7D8790"/>
               </a:solidFill>
             </c:spPr>
           </c:dPt>

--- a/media/exports/trades-sample-statements.pptx
+++ b/media/exports/trades-sample-statements.pptx
@@ -5576,7 +5576,7 @@
                 </a:solidFill>
                 <a:latin typeface="Roboto"/>
               </a:rPr>
-              <a:t>Data retrieved 2pm, Tue 6 Oct 2026 · Generated 8 Oct 2026, 9:35am · Sample data · Made with Python (python-pptx)</a:t>
+              <a:t>Data retrieved 2pm, Tue 6 Oct 2026 · Generated 8 Oct 2026, 9:30pm · Sample data · Made with Python (python-pptx)</a:t>
             </a:r>
           </a:p>
         </p:txBody>
@@ -7512,7 +7512,7 @@
                 </a:solidFill>
                 <a:latin typeface="Roboto"/>
               </a:rPr>
-              <a:t>Data retrieved 2pm, Tue 6 Oct 2026 · Generated 8 Oct 2026, 9:35am · Sample data · Made with Python (python-pptx)</a:t>
+              <a:t>Data retrieved 2pm, Tue 6 Oct 2026 · Generated 8 Oct 2026, 9:30pm · Sample data · Made with Python (python-pptx)</a:t>
             </a:r>
           </a:p>
         </p:txBody>
@@ -8238,7 +8238,7 @@
                 </a:solidFill>
                 <a:latin typeface="Roboto"/>
               </a:rPr>
-              <a:t>Data retrieved 2pm, Tue 6 Oct 2026 · Generated 8 Oct 2026, 9:35am · Sample data · Made with Python (python-pptx)</a:t>
+              <a:t>Data retrieved 2pm, Tue 6 Oct 2026 · Generated 8 Oct 2026, 9:30pm · Sample data · Made with Python (python-pptx)</a:t>
             </a:r>
           </a:p>
         </p:txBody>
@@ -10064,7 +10064,7 @@
                 </a:solidFill>
                 <a:latin typeface="Roboto"/>
               </a:rPr>
-              <a:t>Data retrieved 2pm, Tue 6 Oct 2026 · Generated 8 Oct 2026, 9:35am · Sample data · Made with Python (python-pptx)</a:t>
+              <a:t>Data retrieved 2pm, Tue 6 Oct 2026 · Generated 8 Oct 2026, 9:30pm · Sample data · Made with Python (python-pptx)</a:t>
             </a:r>
           </a:p>
         </p:txBody>
@@ -13624,7 +13624,7 @@
                 </a:solidFill>
                 <a:latin typeface="Roboto"/>
               </a:rPr>
-              <a:t>Data retrieved 2pm, Tue 6 Oct 2026 · Generated 8 Oct 2026, 9:35am · Sample data · Made with Python (python-pptx)</a:t>
+              <a:t>Data retrieved 2pm, Tue 6 Oct 2026 · Generated 8 Oct 2026, 9:30pm · Sample data · Made with Python (python-pptx)</a:t>
             </a:r>
           </a:p>
         </p:txBody>
@@ -15381,7 +15381,7 @@
                           </a:solidFill>
                           <a:latin typeface="Roboto"/>
                         </a:rPr>
-                        <a:t>64 call-outs (each one is in the Excel)</a:t>
+                        <a:t>64 call-outs (each one is in the spreadsheet)</a:t>
                       </a:r>
                     </a:p>
                   </a:txBody>
@@ -15658,7 +15658,7 @@
                 </a:solidFill>
                 <a:latin typeface="Roboto"/>
               </a:rPr>
-              <a:t>Data retrieved 2pm, Tue 6 Oct 2026 · Generated 8 Oct 2026, 9:35am · Sample data · Made with Python (python-pptx)</a:t>
+              <a:t>Data retrieved 2pm, Tue 6 Oct 2026 · Generated 8 Oct 2026, 9:30pm · Sample data · Made with Python (python-pptx)</a:t>
             </a:r>
           </a:p>
         </p:txBody>
@@ -16110,7 +16110,7 @@
                 </a:solidFill>
                 <a:latin typeface="Roboto"/>
               </a:rPr>
-              <a:t>Data retrieved 2pm, Tue 6 Oct 2026 · Generated 8 Oct 2026, 9:35am · Sample data · Made with Python (python-pptx)</a:t>
+              <a:t>Data retrieved 2pm, Tue 6 Oct 2026 · Generated 8 Oct 2026, 9:30pm · Sample data · Made with Python (python-pptx)</a:t>
             </a:r>
           </a:p>
         </p:txBody>
@@ -16530,7 +16530,7 @@
                           </a:solidFill>
                           <a:latin typeface="Roboto"/>
                         </a:rPr>
-                        <a:t>84 in total (every one is in the Excel download and CSV)</a:t>
+                        <a:t>84 in total (every one is in the spreadsheet download and CSV)</a:t>
                       </a:r>
                     </a:p>
                   </a:txBody>
@@ -16618,7 +16618,7 @@
                 </a:solidFill>
                 <a:latin typeface="Roboto"/>
               </a:rPr>
-              <a:t>Data retrieved 2pm, Tue 6 Oct 2026 · Generated 8 Oct 2026, 9:35am · Sample data · Made with Python (python-pptx)</a:t>
+              <a:t>Data retrieved 2pm, Tue 6 Oct 2026 · Generated 8 Oct 2026, 9:30pm · Sample data · Made with Python (python-pptx)</a:t>
             </a:r>
           </a:p>
         </p:txBody>
@@ -17182,7 +17182,7 @@
                 </a:solidFill>
                 <a:latin typeface="Roboto"/>
               </a:rPr>
-              <a:t>Data retrieved 2pm, Tue 6 Oct 2026 · Generated 8 Oct 2026, 9:35am · Sample data · Made with Python (python-pptx)</a:t>
+              <a:t>Data retrieved 2pm, Tue 6 Oct 2026 · Generated 8 Oct 2026, 9:30pm · Sample data · Made with Python (python-pptx)</a:t>
             </a:r>
           </a:p>
         </p:txBody>
@@ -17746,7 +17746,7 @@
                 </a:solidFill>
                 <a:latin typeface="Roboto"/>
               </a:rPr>
-              <a:t>Data retrieved 2pm, Tue 6 Oct 2026 · Generated 8 Oct 2026, 9:35am · Sample data · Made with Python (python-pptx)</a:t>
+              <a:t>Data retrieved 2pm, Tue 6 Oct 2026 · Generated 8 Oct 2026, 9:30pm · Sample data · Made with Python (python-pptx)</a:t>
             </a:r>
           </a:p>
         </p:txBody>
@@ -18502,7 +18502,7 @@
                 </a:solidFill>
                 <a:latin typeface="Roboto"/>
               </a:rPr>
-              <a:t>Data retrieved 2pm, Tue 6 Oct 2026 · Generated 8 Oct 2026, 9:35am · Sample data · Made with Python (python-pptx)</a:t>
+              <a:t>Data retrieved 2pm, Tue 6 Oct 2026 · Generated 8 Oct 2026, 9:30pm · Sample data · Made with Python (python-pptx)</a:t>
             </a:r>
           </a:p>
         </p:txBody>
@@ -18931,7 +18931,7 @@
                 </a:solidFill>
                 <a:latin typeface="Roboto"/>
               </a:rPr>
-              <a:t>Data retrieved 2pm, Tue 6 Oct 2026 · Generated 8 Oct 2026, 9:35am · Sample data · Made with Python (python-pptx)</a:t>
+              <a:t>Data retrieved 2pm, Tue 6 Oct 2026 · Generated 8 Oct 2026, 9:30pm · Sample data · Made with Python (python-pptx)</a:t>
             </a:r>
           </a:p>
         </p:txBody>
@@ -19285,7 +19285,7 @@
                 </a:solidFill>
                 <a:latin typeface="Roboto"/>
               </a:rPr>
-              <a:t>Data retrieved 2pm, Tue 6 Oct 2026 · Generated 8 Oct 2026, 9:35am · Sample data · Made with Python (python-pptx)</a:t>
+              <a:t>Data retrieved 2pm, Tue 6 Oct 2026 · Generated 8 Oct 2026, 9:30pm · Sample data · Made with Python (python-pptx)</a:t>
             </a:r>
           </a:p>
         </p:txBody>
@@ -20181,7 +20181,7 @@
                 </a:solidFill>
                 <a:latin typeface="Roboto"/>
               </a:rPr>
-              <a:t>Data retrieved 2pm, Tue 6 Oct 2026 · Generated 8 Oct 2026, 9:35am · Sample data · Made with Python (python-pptx)</a:t>
+              <a:t>Data retrieved 2pm, Tue 6 Oct 2026 · Generated 8 Oct 2026, 9:30pm · Sample data · Made with Python (python-pptx)</a:t>
             </a:r>
           </a:p>
         </p:txBody>
@@ -20828,7 +20828,7 @@
                 </a:solidFill>
                 <a:latin typeface="Roboto"/>
               </a:rPr>
-              <a:t>Data retrieved 2pm, Tue 6 Oct 2026 · Generated 8 Oct 2026, 9:35am · Sample data · Made with Python (python-pptx)</a:t>
+              <a:t>Data retrieved 2pm, Tue 6 Oct 2026 · Generated 8 Oct 2026, 9:30pm · Sample data · Made with Python (python-pptx)</a:t>
             </a:r>
           </a:p>
         </p:txBody>
@@ -21724,7 +21724,7 @@
                 </a:solidFill>
                 <a:latin typeface="Roboto"/>
               </a:rPr>
-              <a:t>Data retrieved 2pm, Tue 6 Oct 2026 · Generated 8 Oct 2026, 9:35am · Sample data · Made with Python (python-pptx)</a:t>
+              <a:t>Data retrieved 2pm, Tue 6 Oct 2026 · Generated 8 Oct 2026, 9:30pm · Sample data · Made with Python (python-pptx)</a:t>
             </a:r>
           </a:p>
         </p:txBody>
@@ -23660,7 +23660,7 @@
                 </a:solidFill>
                 <a:latin typeface="Roboto"/>
               </a:rPr>
-              <a:t>Data retrieved 2pm, Tue 6 Oct 2026 · Generated 8 Oct 2026, 9:35am · Sample data · Made with Python (python-pptx)</a:t>
+              <a:t>Data retrieved 2pm, Tue 6 Oct 2026 · Generated 8 Oct 2026, 9:30pm · Sample data · Made with Python (python-pptx)</a:t>
             </a:r>
           </a:p>
         </p:txBody>
@@ -25156,7 +25156,7 @@
                 </a:solidFill>
                 <a:latin typeface="Roboto"/>
               </a:rPr>
-              <a:t>Data retrieved 2pm, Tue 6 Oct 2026 · Generated 8 Oct 2026, 9:35am · Sample data · Made with Python (python-pptx)</a:t>
+              <a:t>Data retrieved 2pm, Tue 6 Oct 2026 · Generated 8 Oct 2026, 9:30pm · Sample data · Made with Python (python-pptx)</a:t>
             </a:r>
           </a:p>
         </p:txBody>

--- a/media/exports/trades-sample-statements.pptx
+++ b/media/exports/trades-sample-statements.pptx
@@ -23,6 +23,7 @@
     <p:sldId id="271" r:id="rId23"/>
     <p:sldId id="272" r:id="rId24"/>
     <p:sldId id="273" r:id="rId25"/>
+    <p:sldId id="274" r:id="rId26"/>
   </p:sldIdLst>
   <p:sldSz cx="12191695" cy="6858000" type="screen4x3"/>
   <p:notesSz cx="6858000" cy="9144000"/>
@@ -178,7 +179,7 @@
             <c:idx val="2"/>
             <c:spPr>
               <a:solidFill>
-                <a:srgbClr val="7D8790"/>
+                <a:srgbClr val="0E9F6E"/>
               </a:solidFill>
             </c:spPr>
           </c:dPt>
@@ -239,22 +240,22 @@
                 <c:formatCode>0.0"%";[Red](0.0"%")</c:formatCode>
                 <c:ptCount val="6"/>
                 <c:pt idx="0">
-                  <c:v>13.5</c:v>
+                  <c:v>22.7</c:v>
                 </c:pt>
                 <c:pt idx="1">
-                  <c:v>26.9</c:v>
+                  <c:v>34.8</c:v>
                 </c:pt>
                 <c:pt idx="2">
-                  <c:v>33.5</c:v>
+                  <c:v>40.4</c:v>
                 </c:pt>
                 <c:pt idx="3">
-                  <c:v>36.6</c:v>
+                  <c:v>43.3</c:v>
                 </c:pt>
                 <c:pt idx="4">
-                  <c:v>39.5</c:v>
+                  <c:v>45.9</c:v>
                 </c:pt>
                 <c:pt idx="5">
-                  <c:v>45.2</c:v>
+                  <c:v>51.2</c:v>
                 </c:pt>
               </c:numCache>
             </c:numRef>
@@ -318,7 +319,7 @@
       <c:valAx>
         <c:axId val="-2113994440"/>
         <c:scaling>
-          <c:max val="51.98"/>
+          <c:max val="58.879999999999995"/>
           <c:min val="0.0"/>
         </c:scaling>
         <c:delete/>
@@ -404,7 +405,7 @@
             <c:idx val="2"/>
             <c:spPr>
               <a:solidFill>
-                <a:srgbClr val="7D8790"/>
+                <a:srgbClr val="0E9F6E"/>
               </a:solidFill>
             </c:spPr>
           </c:dPt>
@@ -465,22 +466,22 @@
                 <c:formatCode>$#,##0;[Red]($#,##0);"-"</c:formatCode>
                 <c:ptCount val="6"/>
                 <c:pt idx="0">
-                  <c:v>6300</c:v>
+                  <c:v>11900</c:v>
                 </c:pt>
                 <c:pt idx="1">
-                  <c:v>7372</c:v>
+                  <c:v>10672</c:v>
                 </c:pt>
                 <c:pt idx="2">
-                  <c:v>4316</c:v>
+                  <c:v>5816</c:v>
                 </c:pt>
                 <c:pt idx="3">
-                  <c:v>5564</c:v>
+                  <c:v>7364</c:v>
                 </c:pt>
                 <c:pt idx="4">
-                  <c:v>7348</c:v>
+                  <c:v>9548</c:v>
                 </c:pt>
                 <c:pt idx="5">
-                  <c:v>4432</c:v>
+                  <c:v>5632</c:v>
                 </c:pt>
               </c:numCache>
             </c:numRef>
@@ -544,7 +545,7 @@
       <c:valAx>
         <c:axId val="-2113994440"/>
         <c:scaling>
-          <c:max val="8477.8"/>
+          <c:max val="13684.999999999998"/>
           <c:min val="0.0"/>
         </c:scaling>
         <c:delete/>
@@ -1626,6 +1627,76 @@
 </p:notes>
 </file>
 
+<file path=ppt/notesSlides/notesSlide19.xml><?xml version="1.0" encoding="utf-8"?>
+<p:notes xmlns:a="http://schemas.openxmlformats.org/drawingml/2006/main" xmlns:p="http://schemas.openxmlformats.org/presentationml/2006/main" xmlns:r="http://schemas.openxmlformats.org/officeDocument/2006/relationships">
+  <p:cSld>
+    <p:spTree>
+      <p:nvGrpSpPr>
+        <p:cNvPr id="1" name=""/>
+        <p:cNvGrpSpPr/>
+        <p:nvPr/>
+      </p:nvGrpSpPr>
+      <p:grpSpPr>
+        <a:xfrm>
+          <a:off x="0" y="0"/>
+          <a:ext cx="0" cy="0"/>
+          <a:chOff x="0" y="0"/>
+          <a:chExt cx="0" cy="0"/>
+        </a:xfrm>
+      </p:grpSpPr>
+      <p:sp>
+        <p:nvSpPr>
+          <p:cNvPr id="2" name="Slide Image Placeholder 1"/>
+          <p:cNvSpPr>
+            <a:spLocks noGrp="1"/>
+          </p:cNvSpPr>
+          <p:nvPr>
+            <p:ph type="sldImg" idx="2"/>
+          </p:nvPr>
+        </p:nvSpPr>
+        <p:spPr/>
+      </p:sp>
+      <p:sp>
+        <p:nvSpPr>
+          <p:cNvPr id="3" name="Notes Placeholder 2"/>
+          <p:cNvSpPr>
+            <a:spLocks noGrp="1"/>
+          </p:cNvSpPr>
+          <p:nvPr>
+            <p:ph type="body" idx="3" sz="quarter"/>
+          </p:nvPr>
+        </p:nvSpPr>
+        <p:spPr/>
+        <p:txBody>
+          <a:bodyPr/>
+          <a:lstStyle/>
+          <a:p>
+            <a:r>
+              <a:t>Assumptions: GST, BAS and payroll</a:t>
+            </a:r>
+          </a:p>
+        </p:txBody>
+      </p:sp>
+      <p:sp>
+        <p:nvSpPr>
+          <p:cNvPr id="4" name="Slide Number Placeholder 3"/>
+          <p:cNvSpPr>
+            <a:spLocks noGrp="1"/>
+          </p:cNvSpPr>
+          <p:nvPr>
+            <p:ph type="sldNum" idx="5" sz="quarter"/>
+          </p:nvPr>
+        </p:nvSpPr>
+        <p:spPr/>
+      </p:sp>
+    </p:spTree>
+  </p:cSld>
+  <p:clrMapOvr>
+    <a:masterClrMapping/>
+  </p:clrMapOvr>
+</p:notes>
+</file>
+
 <file path=ppt/notesSlides/notesSlide2.xml><?xml version="1.0" encoding="utf-8"?>
 <p:notes xmlns:a="http://schemas.openxmlformats.org/drawingml/2006/main" xmlns:p="http://schemas.openxmlformats.org/presentationml/2006/main" xmlns:r="http://schemas.openxmlformats.org/officeDocument/2006/relationships">
   <p:cSld>
@@ -1671,7 +1742,7 @@
           <a:lstStyle/>
           <a:p>
             <a:r>
-              <a:t>The fourth sheet: September 2026 vs August 2026: Gross margin (P&amp;L), September 34.4%; Cost to win a customer $162; Technician time on jobs 64.3%.</a:t>
+              <a:t>The fourth sheet: September 2026 vs August 2026: Gross margin (P&amp;L), September 30.1%; Cost to win a customer $162; Technician time on jobs 64.3%.</a:t>
             </a:r>
           </a:p>
         </p:txBody>
@@ -5576,7 +5647,7 @@
                 </a:solidFill>
                 <a:latin typeface="Roboto"/>
               </a:rPr>
-              <a:t>Data retrieved 2pm, Tue 6 Oct 2026 · Generated 8 Oct 2026, 9:30pm · Sample data · Made with Python (python-pptx)</a:t>
+              <a:t>Data retrieved 2pm, Tue 6 Oct 2026 · Generated 9 Oct 2026, 8:39am · Sample data · Made with Python (python-pptx)</a:t>
             </a:r>
           </a:p>
         </p:txBody>
@@ -5615,7 +5686,7 @@
                 </a:solidFill>
                 <a:latin typeface="Roboto"/>
               </a:rPr>
-              <a:t>Slide 1 of 18</a:t>
+              <a:t>Slide 1 of 19</a:t>
             </a:r>
           </a:p>
         </p:txBody>
@@ -5940,7 +6011,7 @@
                           </a:solidFill>
                           <a:latin typeface="Roboto"/>
                         </a:rPr>
-                        <a:t>59,746</a:t>
+                        <a:t>120,228</a:t>
                       </a:r>
                     </a:p>
                   </a:txBody>
@@ -5967,7 +6038,7 @@
                           </a:solidFill>
                           <a:latin typeface="Roboto"/>
                         </a:rPr>
-                        <a:t>65,263</a:t>
+                        <a:t>92,859</a:t>
                       </a:r>
                     </a:p>
                   </a:txBody>
@@ -5990,11 +6061,11 @@
                       <a:r>
                         <a:rPr sz="1050">
                           <a:solidFill>
-                            <a:srgbClr val="B42318"/>
-                          </a:solidFill>
-                          <a:latin typeface="Roboto"/>
-                        </a:rPr>
-                        <a:t>(5,517)</a:t>
+                            <a:srgbClr val="25342A"/>
+                          </a:solidFill>
+                          <a:latin typeface="Roboto"/>
+                        </a:rPr>
+                        <a:t>27,369</a:t>
                       </a:r>
                     </a:p>
                   </a:txBody>
@@ -6050,7 +6121,7 @@
                           </a:solidFill>
                           <a:latin typeface="Roboto"/>
                         </a:rPr>
-                        <a:t>151,063</a:t>
+                        <a:t>185,678</a:t>
                       </a:r>
                     </a:p>
                   </a:txBody>
@@ -6077,7 +6148,7 @@
                           </a:solidFill>
                           <a:latin typeface="Roboto"/>
                         </a:rPr>
-                        <a:t>129,819</a:t>
+                        <a:t>159,756</a:t>
                       </a:r>
                     </a:p>
                   </a:txBody>
@@ -6104,7 +6175,7 @@
                           </a:solidFill>
                           <a:latin typeface="Roboto"/>
                         </a:rPr>
-                        <a:t>21,244</a:t>
+                        <a:t>25,922</a:t>
                       </a:r>
                     </a:p>
                   </a:txBody>
@@ -6380,7 +6451,7 @@
                           </a:solidFill>
                           <a:latin typeface="Roboto"/>
                         </a:rPr>
-                        <a:t>297,809</a:t>
+                        <a:t>392,906</a:t>
                       </a:r>
                     </a:p>
                   </a:txBody>
@@ -6407,7 +6478,7 @@
                           </a:solidFill>
                           <a:latin typeface="Roboto"/>
                         </a:rPr>
-                        <a:t>282,082</a:t>
+                        <a:t>339,615</a:t>
                       </a:r>
                     </a:p>
                   </a:txBody>
@@ -6434,7 +6505,7 @@
                           </a:solidFill>
                           <a:latin typeface="Roboto"/>
                         </a:rPr>
-                        <a:t>15,727</a:t>
+                        <a:t>53,291</a:t>
                       </a:r>
                     </a:p>
                   </a:txBody>
@@ -6600,7 +6671,7 @@
                           </a:solidFill>
                           <a:latin typeface="Roboto"/>
                         </a:rPr>
-                        <a:t>553,009</a:t>
+                        <a:t>648,106</a:t>
                       </a:r>
                     </a:p>
                   </a:txBody>
@@ -6627,7 +6698,7 @@
                           </a:solidFill>
                           <a:latin typeface="Roboto"/>
                         </a:rPr>
-                        <a:t>529,782</a:t>
+                        <a:t>587,315</a:t>
                       </a:r>
                     </a:p>
                   </a:txBody>
@@ -6654,7 +6725,7 @@
                           </a:solidFill>
                           <a:latin typeface="Roboto"/>
                         </a:rPr>
-                        <a:t>23,227</a:t>
+                        <a:t>60,791</a:t>
                       </a:r>
                     </a:p>
                   </a:txBody>
@@ -6710,7 +6781,7 @@
                           </a:solidFill>
                           <a:latin typeface="Roboto"/>
                         </a:rPr>
-                        <a:t>78,060</a:t>
+                        <a:t>85,866</a:t>
                       </a:r>
                     </a:p>
                   </a:txBody>
@@ -6737,7 +6808,7 @@
                           </a:solidFill>
                           <a:latin typeface="Roboto"/>
                         </a:rPr>
-                        <a:t>60,830</a:t>
+                        <a:t>66,913</a:t>
                       </a:r>
                     </a:p>
                   </a:txBody>
@@ -6764,7 +6835,7 @@
                           </a:solidFill>
                           <a:latin typeface="Roboto"/>
                         </a:rPr>
-                        <a:t>17,230</a:t>
+                        <a:t>18,953</a:t>
                       </a:r>
                     </a:p>
                   </a:txBody>
@@ -6793,7 +6864,7 @@
                           </a:solidFill>
                           <a:latin typeface="Roboto"/>
                         </a:rPr>
-                        <a:t>Employee leave provisions</a:t>
+                        <a:t>Wages owed (since the last pay run)</a:t>
                       </a:r>
                     </a:p>
                   </a:txBody>
@@ -6820,7 +6891,7 @@
                           </a:solidFill>
                           <a:latin typeface="Roboto"/>
                         </a:rPr>
-                        <a:t>106,000</a:t>
+                        <a:t>37,678</a:t>
                       </a:r>
                     </a:p>
                   </a:txBody>
@@ -6847,7 +6918,7 @@
                           </a:solidFill>
                           <a:latin typeface="Roboto"/>
                         </a:rPr>
-                        <a:t>105,100</a:t>
+                        <a:t>27,458</a:t>
                       </a:r>
                     </a:p>
                   </a:txBody>
@@ -6874,7 +6945,7 @@
                           </a:solidFill>
                           <a:latin typeface="Roboto"/>
                         </a:rPr>
-                        <a:t>900</a:t>
+                        <a:t>10,220</a:t>
                       </a:r>
                     </a:p>
                   </a:txBody>
@@ -6903,7 +6974,7 @@
                           </a:solidFill>
                           <a:latin typeface="Roboto"/>
                         </a:rPr>
-                        <a:t>Income tax payable</a:t>
+                        <a:t>Super payable</a:t>
                       </a:r>
                     </a:p>
                   </a:txBody>
@@ -6930,7 +7001,7 @@
                           </a:solidFill>
                           <a:latin typeface="Roboto"/>
                         </a:rPr>
-                        <a:t>35,043</a:t>
+                        <a:t>4,523</a:t>
                       </a:r>
                     </a:p>
                   </a:txBody>
@@ -6957,7 +7028,7 @@
                           </a:solidFill>
                           <a:latin typeface="Roboto"/>
                         </a:rPr>
-                        <a:t>32,519</a:t>
+                        <a:t>3,296</a:t>
                       </a:r>
                     </a:p>
                   </a:txBody>
@@ -6984,7 +7055,7 @@
                           </a:solidFill>
                           <a:latin typeface="Roboto"/>
                         </a:rPr>
-                        <a:t>2,524</a:t>
+                        <a:t>1,227</a:t>
                       </a:r>
                     </a:p>
                   </a:txBody>
@@ -7007,13 +7078,13 @@
                         </a:defRPr>
                       </a:pPr>
                       <a:r>
-                        <a:rPr sz="1050" b="1">
-                          <a:solidFill>
-                            <a:srgbClr val="25342A"/>
-                          </a:solidFill>
-                          <a:latin typeface="Roboto"/>
-                        </a:rPr>
-                        <a:t>Total current liabilities</a:t>
+                        <a:rPr sz="1050">
+                          <a:solidFill>
+                            <a:srgbClr val="25342A"/>
+                          </a:solidFill>
+                          <a:latin typeface="Roboto"/>
+                        </a:rPr>
+                        <a:t>PAYG withholding payable</a:t>
                       </a:r>
                     </a:p>
                   </a:txBody>
@@ -7034,13 +7105,13 @@
                         </a:defRPr>
                       </a:pPr>
                       <a:r>
-                        <a:rPr sz="1050" b="1">
-                          <a:solidFill>
-                            <a:srgbClr val="25342A"/>
-                          </a:solidFill>
-                          <a:latin typeface="Roboto"/>
-                        </a:rPr>
-                        <a:t>219,103</a:t>
+                        <a:rPr sz="1050">
+                          <a:solidFill>
+                            <a:srgbClr val="25342A"/>
+                          </a:solidFill>
+                          <a:latin typeface="Roboto"/>
+                        </a:rPr>
+                        <a:t>47,754</a:t>
                       </a:r>
                     </a:p>
                   </a:txBody>
@@ -7061,13 +7132,13 @@
                         </a:defRPr>
                       </a:pPr>
                       <a:r>
-                        <a:rPr sz="1050" b="1">
-                          <a:solidFill>
-                            <a:srgbClr val="25342A"/>
-                          </a:solidFill>
-                          <a:latin typeface="Roboto"/>
-                        </a:rPr>
-                        <a:t>198,449</a:t>
+                        <a:rPr sz="1050">
+                          <a:solidFill>
+                            <a:srgbClr val="25342A"/>
+                          </a:solidFill>
+                          <a:latin typeface="Roboto"/>
+                        </a:rPr>
+                        <a:t>31,836</a:t>
                       </a:r>
                     </a:p>
                   </a:txBody>
@@ -7088,13 +7159,13 @@
                         </a:defRPr>
                       </a:pPr>
                       <a:r>
-                        <a:rPr sz="1050" b="1">
-                          <a:solidFill>
-                            <a:srgbClr val="25342A"/>
-                          </a:solidFill>
-                          <a:latin typeface="Roboto"/>
-                        </a:rPr>
-                        <a:t>20,654</a:t>
+                        <a:rPr sz="1050">
+                          <a:solidFill>
+                            <a:srgbClr val="25342A"/>
+                          </a:solidFill>
+                          <a:latin typeface="Roboto"/>
+                        </a:rPr>
+                        <a:t>15,918</a:t>
                       </a:r>
                     </a:p>
                   </a:txBody>
@@ -7123,7 +7194,7 @@
                           </a:solidFill>
                           <a:latin typeface="Roboto"/>
                         </a:rPr>
-                        <a:t>Equipment finance</a:t>
+                        <a:t>GST payable (net)</a:t>
                       </a:r>
                     </a:p>
                   </a:txBody>
@@ -7150,7 +7221,7 @@
                           </a:solidFill>
                           <a:latin typeface="Roboto"/>
                         </a:rPr>
-                        <a:t>95,000</a:t>
+                        <a:t>32,817</a:t>
                       </a:r>
                     </a:p>
                   </a:txBody>
@@ -7177,7 +7248,7 @@
                           </a:solidFill>
                           <a:latin typeface="Roboto"/>
                         </a:rPr>
-                        <a:t>100,000</a:t>
+                        <a:t>22,477</a:t>
                       </a:r>
                     </a:p>
                   </a:txBody>
@@ -7200,11 +7271,11 @@
                       <a:r>
                         <a:rPr sz="1050">
                           <a:solidFill>
-                            <a:srgbClr val="B42318"/>
-                          </a:solidFill>
-                          <a:latin typeface="Roboto"/>
-                        </a:rPr>
-                        <a:t>(5,000)</a:t>
+                            <a:srgbClr val="25342A"/>
+                          </a:solidFill>
+                          <a:latin typeface="Roboto"/>
+                        </a:rPr>
+                        <a:t>10,340</a:t>
                       </a:r>
                     </a:p>
                   </a:txBody>
@@ -7227,13 +7298,13 @@
                         </a:defRPr>
                       </a:pPr>
                       <a:r>
-                        <a:rPr sz="1050" b="1">
-                          <a:solidFill>
-                            <a:srgbClr val="25342A"/>
-                          </a:solidFill>
-                          <a:latin typeface="Roboto"/>
-                        </a:rPr>
-                        <a:t>Total liabilities</a:t>
+                        <a:rPr sz="1050">
+                          <a:solidFill>
+                            <a:srgbClr val="25342A"/>
+                          </a:solidFill>
+                          <a:latin typeface="Roboto"/>
+                        </a:rPr>
+                        <a:t>Employee leave provisions</a:t>
                       </a:r>
                     </a:p>
                   </a:txBody>
@@ -7254,13 +7325,13 @@
                         </a:defRPr>
                       </a:pPr>
                       <a:r>
-                        <a:rPr sz="1050" b="1">
-                          <a:solidFill>
-                            <a:srgbClr val="25342A"/>
-                          </a:solidFill>
-                          <a:latin typeface="Roboto"/>
-                        </a:rPr>
-                        <a:t>314,103</a:t>
+                        <a:rPr sz="1050">
+                          <a:solidFill>
+                            <a:srgbClr val="25342A"/>
+                          </a:solidFill>
+                          <a:latin typeface="Roboto"/>
+                        </a:rPr>
+                        <a:t>106,000</a:t>
                       </a:r>
                     </a:p>
                   </a:txBody>
@@ -7281,13 +7352,13 @@
                         </a:defRPr>
                       </a:pPr>
                       <a:r>
-                        <a:rPr sz="1050" b="1">
-                          <a:solidFill>
-                            <a:srgbClr val="25342A"/>
-                          </a:solidFill>
-                          <a:latin typeface="Roboto"/>
-                        </a:rPr>
-                        <a:t>298,449</a:t>
+                        <a:rPr sz="1050">
+                          <a:solidFill>
+                            <a:srgbClr val="25342A"/>
+                          </a:solidFill>
+                          <a:latin typeface="Roboto"/>
+                        </a:rPr>
+                        <a:t>105,100</a:t>
                       </a:r>
                     </a:p>
                   </a:txBody>
@@ -7308,13 +7379,13 @@
                         </a:defRPr>
                       </a:pPr>
                       <a:r>
-                        <a:rPr sz="1050" b="1">
-                          <a:solidFill>
-                            <a:srgbClr val="25342A"/>
-                          </a:solidFill>
-                          <a:latin typeface="Roboto"/>
-                        </a:rPr>
-                        <a:t>15,654</a:t>
+                        <a:rPr sz="1050">
+                          <a:solidFill>
+                            <a:srgbClr val="25342A"/>
+                          </a:solidFill>
+                          <a:latin typeface="Roboto"/>
+                        </a:rPr>
+                        <a:t>900</a:t>
                       </a:r>
                     </a:p>
                   </a:txBody>
@@ -7337,13 +7408,13 @@
                         </a:defRPr>
                       </a:pPr>
                       <a:r>
-                        <a:rPr sz="1050" b="1">
-                          <a:solidFill>
-                            <a:srgbClr val="25342A"/>
-                          </a:solidFill>
-                          <a:latin typeface="Roboto"/>
-                        </a:rPr>
-                        <a:t>Net assets</a:t>
+                        <a:rPr sz="1050">
+                          <a:solidFill>
+                            <a:srgbClr val="25342A"/>
+                          </a:solidFill>
+                          <a:latin typeface="Roboto"/>
+                        </a:rPr>
+                        <a:t>Income tax payable</a:t>
                       </a:r>
                     </a:p>
                   </a:txBody>
@@ -7364,13 +7435,13 @@
                         </a:defRPr>
                       </a:pPr>
                       <a:r>
-                        <a:rPr sz="1050" b="1">
-                          <a:solidFill>
-                            <a:srgbClr val="25342A"/>
-                          </a:solidFill>
-                          <a:latin typeface="Roboto"/>
-                        </a:rPr>
-                        <a:t>238,906</a:t>
+                        <a:rPr sz="1050">
+                          <a:solidFill>
+                            <a:srgbClr val="25342A"/>
+                          </a:solidFill>
+                          <a:latin typeface="Roboto"/>
+                        </a:rPr>
+                        <a:t>35,268</a:t>
                       </a:r>
                     </a:p>
                   </a:txBody>
@@ -7391,13 +7462,13 @@
                         </a:defRPr>
                       </a:pPr>
                       <a:r>
-                        <a:rPr sz="1050" b="1">
-                          <a:solidFill>
-                            <a:srgbClr val="25342A"/>
-                          </a:solidFill>
-                          <a:latin typeface="Roboto"/>
-                        </a:rPr>
-                        <a:t>231,333</a:t>
+                        <a:rPr sz="1050">
+                          <a:solidFill>
+                            <a:srgbClr val="25342A"/>
+                          </a:solidFill>
+                          <a:latin typeface="Roboto"/>
+                        </a:rPr>
+                        <a:t>33,210</a:t>
                       </a:r>
                     </a:p>
                   </a:txBody>
@@ -7418,13 +7489,13 @@
                         </a:defRPr>
                       </a:pPr>
                       <a:r>
-                        <a:rPr sz="1050" b="1">
-                          <a:solidFill>
-                            <a:srgbClr val="25342A"/>
-                          </a:solidFill>
-                          <a:latin typeface="Roboto"/>
-                        </a:rPr>
-                        <a:t>7,573</a:t>
+                        <a:rPr sz="1050">
+                          <a:solidFill>
+                            <a:srgbClr val="25342A"/>
+                          </a:solidFill>
+                          <a:latin typeface="Roboto"/>
+                        </a:rPr>
+                        <a:t>2,058</a:t>
                       </a:r>
                     </a:p>
                   </a:txBody>
@@ -7512,7 +7583,7 @@
                 </a:solidFill>
                 <a:latin typeface="Roboto"/>
               </a:rPr>
-              <a:t>Data retrieved 2pm, Tue 6 Oct 2026 · Generated 8 Oct 2026, 9:30pm · Sample data · Made with Python (python-pptx)</a:t>
+              <a:t>Data retrieved 2pm, Tue 6 Oct 2026 · Generated 9 Oct 2026, 8:39am · Sample data · Made with Python (python-pptx)</a:t>
             </a:r>
           </a:p>
         </p:txBody>
@@ -7551,7 +7622,7 @@
                 </a:solidFill>
                 <a:latin typeface="Roboto"/>
               </a:rPr>
-              <a:t>Slide 10 of 18</a:t>
+              <a:t>Slide 10 of 19</a:t>
             </a:r>
           </a:p>
         </p:txBody>
@@ -7707,7 +7778,7 @@
         </p:nvGraphicFramePr>
         <p:xfrm>
           <a:off x="457200" y="960120"/>
-          <a:ext cx="11277295" cy="1243584"/>
+          <a:ext cx="11277295" cy="2487168"/>
         </p:xfrm>
         <a:graphic>
           <a:graphicData uri="http://schemas.openxmlformats.org/drawingml/2006/table">
@@ -7843,13 +7914,13 @@
                         </a:defRPr>
                       </a:pPr>
                       <a:r>
-                        <a:rPr sz="1050">
-                          <a:solidFill>
-                            <a:srgbClr val="25342A"/>
-                          </a:solidFill>
-                          <a:latin typeface="Roboto"/>
-                        </a:rPr>
-                        <a:t>Share capital</a:t>
+                        <a:rPr sz="1050" b="1">
+                          <a:solidFill>
+                            <a:srgbClr val="25342A"/>
+                          </a:solidFill>
+                          <a:latin typeface="Roboto"/>
+                        </a:rPr>
+                        <a:t>Total current liabilities</a:t>
                       </a:r>
                     </a:p>
                   </a:txBody>
@@ -7870,13 +7941,13 @@
                         </a:defRPr>
                       </a:pPr>
                       <a:r>
-                        <a:rPr sz="1050">
-                          <a:solidFill>
-                            <a:srgbClr val="25342A"/>
-                          </a:solidFill>
-                          <a:latin typeface="Roboto"/>
-                        </a:rPr>
-                        <a:t>10,000</a:t>
+                        <a:rPr sz="1050" b="1">
+                          <a:solidFill>
+                            <a:srgbClr val="25342A"/>
+                          </a:solidFill>
+                          <a:latin typeface="Roboto"/>
+                        </a:rPr>
+                        <a:t>349,906</a:t>
                       </a:r>
                     </a:p>
                   </a:txBody>
@@ -7897,13 +7968,13 @@
                         </a:defRPr>
                       </a:pPr>
                       <a:r>
-                        <a:rPr sz="1050">
-                          <a:solidFill>
-                            <a:srgbClr val="25342A"/>
-                          </a:solidFill>
-                          <a:latin typeface="Roboto"/>
-                        </a:rPr>
-                        <a:t>10,000</a:t>
+                        <a:rPr sz="1050" b="1">
+                          <a:solidFill>
+                            <a:srgbClr val="25342A"/>
+                          </a:solidFill>
+                          <a:latin typeface="Roboto"/>
+                        </a:rPr>
+                        <a:t>290,290</a:t>
                       </a:r>
                     </a:p>
                   </a:txBody>
@@ -7924,13 +7995,13 @@
                         </a:defRPr>
                       </a:pPr>
                       <a:r>
-                        <a:rPr sz="1050">
-                          <a:solidFill>
-                            <a:srgbClr val="25342A"/>
-                          </a:solidFill>
-                          <a:latin typeface="Roboto"/>
-                        </a:rPr>
-                        <a:t>-</a:t>
+                        <a:rPr sz="1050" b="1">
+                          <a:solidFill>
+                            <a:srgbClr val="25342A"/>
+                          </a:solidFill>
+                          <a:latin typeface="Roboto"/>
+                        </a:rPr>
+                        <a:t>59,616</a:t>
                       </a:r>
                     </a:p>
                   </a:txBody>
@@ -7959,7 +8030,7 @@
                           </a:solidFill>
                           <a:latin typeface="Roboto"/>
                         </a:rPr>
-                        <a:t>Retained earnings</a:t>
+                        <a:t>Equipment finance</a:t>
                       </a:r>
                     </a:p>
                   </a:txBody>
@@ -7986,7 +8057,7 @@
                           </a:solidFill>
                           <a:latin typeface="Roboto"/>
                         </a:rPr>
-                        <a:t>228,906</a:t>
+                        <a:t>95,000</a:t>
                       </a:r>
                     </a:p>
                   </a:txBody>
@@ -8013,7 +8084,7 @@
                           </a:solidFill>
                           <a:latin typeface="Roboto"/>
                         </a:rPr>
-                        <a:t>221,333</a:t>
+                        <a:t>100,000</a:t>
                       </a:r>
                     </a:p>
                   </a:txBody>
@@ -8036,11 +8107,11 @@
                       <a:r>
                         <a:rPr sz="1050">
                           <a:solidFill>
-                            <a:srgbClr val="25342A"/>
-                          </a:solidFill>
-                          <a:latin typeface="Roboto"/>
-                        </a:rPr>
-                        <a:t>7,573</a:t>
+                            <a:srgbClr val="B42318"/>
+                          </a:solidFill>
+                          <a:latin typeface="Roboto"/>
+                        </a:rPr>
+                        <a:t>(5,000)</a:t>
                       </a:r>
                     </a:p>
                   </a:txBody>
@@ -8069,6 +8140,446 @@
                           </a:solidFill>
                           <a:latin typeface="Roboto"/>
                         </a:rPr>
+                        <a:t>Total liabilities</a:t>
+                      </a:r>
+                    </a:p>
+                  </a:txBody>
+                  <a:tcPr>
+                    <a:solidFill>
+                      <a:srgbClr val="FFFFFF"/>
+                    </a:solidFill>
+                  </a:tcPr>
+                </a:tc>
+                <a:tc>
+                  <a:txBody>
+                    <a:bodyPr/>
+                    <a:lstStyle/>
+                    <a:p>
+                      <a:pPr algn="r">
+                        <a:defRPr>
+                          <a:latin typeface="Roboto"/>
+                        </a:defRPr>
+                      </a:pPr>
+                      <a:r>
+                        <a:rPr sz="1050" b="1">
+                          <a:solidFill>
+                            <a:srgbClr val="25342A"/>
+                          </a:solidFill>
+                          <a:latin typeface="Roboto"/>
+                        </a:rPr>
+                        <a:t>444,906</a:t>
+                      </a:r>
+                    </a:p>
+                  </a:txBody>
+                  <a:tcPr>
+                    <a:solidFill>
+                      <a:srgbClr val="FFFFFF"/>
+                    </a:solidFill>
+                  </a:tcPr>
+                </a:tc>
+                <a:tc>
+                  <a:txBody>
+                    <a:bodyPr/>
+                    <a:lstStyle/>
+                    <a:p>
+                      <a:pPr algn="r">
+                        <a:defRPr>
+                          <a:latin typeface="Roboto"/>
+                        </a:defRPr>
+                      </a:pPr>
+                      <a:r>
+                        <a:rPr sz="1050" b="1">
+                          <a:solidFill>
+                            <a:srgbClr val="25342A"/>
+                          </a:solidFill>
+                          <a:latin typeface="Roboto"/>
+                        </a:rPr>
+                        <a:t>390,290</a:t>
+                      </a:r>
+                    </a:p>
+                  </a:txBody>
+                  <a:tcPr>
+                    <a:solidFill>
+                      <a:srgbClr val="FFFFFF"/>
+                    </a:solidFill>
+                  </a:tcPr>
+                </a:tc>
+                <a:tc>
+                  <a:txBody>
+                    <a:bodyPr/>
+                    <a:lstStyle/>
+                    <a:p>
+                      <a:pPr algn="r">
+                        <a:defRPr>
+                          <a:latin typeface="Roboto"/>
+                        </a:defRPr>
+                      </a:pPr>
+                      <a:r>
+                        <a:rPr sz="1050" b="1">
+                          <a:solidFill>
+                            <a:srgbClr val="25342A"/>
+                          </a:solidFill>
+                          <a:latin typeface="Roboto"/>
+                        </a:rPr>
+                        <a:t>54,616</a:t>
+                      </a:r>
+                    </a:p>
+                  </a:txBody>
+                  <a:tcPr>
+                    <a:solidFill>
+                      <a:srgbClr val="FFFFFF"/>
+                    </a:solidFill>
+                  </a:tcPr>
+                </a:tc>
+              </a:tr>
+              <a:tr h="310896">
+                <a:tc>
+                  <a:txBody>
+                    <a:bodyPr/>
+                    <a:lstStyle/>
+                    <a:p>
+                      <a:pPr algn="l">
+                        <a:defRPr>
+                          <a:latin typeface="Roboto"/>
+                        </a:defRPr>
+                      </a:pPr>
+                      <a:r>
+                        <a:rPr sz="1050" b="1">
+                          <a:solidFill>
+                            <a:srgbClr val="25342A"/>
+                          </a:solidFill>
+                          <a:latin typeface="Roboto"/>
+                        </a:rPr>
+                        <a:t>Net assets</a:t>
+                      </a:r>
+                    </a:p>
+                  </a:txBody>
+                  <a:tcPr>
+                    <a:solidFill>
+                      <a:srgbClr val="F7FAF7"/>
+                    </a:solidFill>
+                  </a:tcPr>
+                </a:tc>
+                <a:tc>
+                  <a:txBody>
+                    <a:bodyPr/>
+                    <a:lstStyle/>
+                    <a:p>
+                      <a:pPr algn="r">
+                        <a:defRPr>
+                          <a:latin typeface="Roboto"/>
+                        </a:defRPr>
+                      </a:pPr>
+                      <a:r>
+                        <a:rPr sz="1050" b="1">
+                          <a:solidFill>
+                            <a:srgbClr val="25342A"/>
+                          </a:solidFill>
+                          <a:latin typeface="Roboto"/>
+                        </a:rPr>
+                        <a:t>203,200</a:t>
+                      </a:r>
+                    </a:p>
+                  </a:txBody>
+                  <a:tcPr>
+                    <a:solidFill>
+                      <a:srgbClr val="F7FAF7"/>
+                    </a:solidFill>
+                  </a:tcPr>
+                </a:tc>
+                <a:tc>
+                  <a:txBody>
+                    <a:bodyPr/>
+                    <a:lstStyle/>
+                    <a:p>
+                      <a:pPr algn="r">
+                        <a:defRPr>
+                          <a:latin typeface="Roboto"/>
+                        </a:defRPr>
+                      </a:pPr>
+                      <a:r>
+                        <a:rPr sz="1050" b="1">
+                          <a:solidFill>
+                            <a:srgbClr val="25342A"/>
+                          </a:solidFill>
+                          <a:latin typeface="Roboto"/>
+                        </a:rPr>
+                        <a:t>197,025</a:t>
+                      </a:r>
+                    </a:p>
+                  </a:txBody>
+                  <a:tcPr>
+                    <a:solidFill>
+                      <a:srgbClr val="F7FAF7"/>
+                    </a:solidFill>
+                  </a:tcPr>
+                </a:tc>
+                <a:tc>
+                  <a:txBody>
+                    <a:bodyPr/>
+                    <a:lstStyle/>
+                    <a:p>
+                      <a:pPr algn="r">
+                        <a:defRPr>
+                          <a:latin typeface="Roboto"/>
+                        </a:defRPr>
+                      </a:pPr>
+                      <a:r>
+                        <a:rPr sz="1050" b="1">
+                          <a:solidFill>
+                            <a:srgbClr val="25342A"/>
+                          </a:solidFill>
+                          <a:latin typeface="Roboto"/>
+                        </a:rPr>
+                        <a:t>6,175</a:t>
+                      </a:r>
+                    </a:p>
+                  </a:txBody>
+                  <a:tcPr>
+                    <a:solidFill>
+                      <a:srgbClr val="F7FAF7"/>
+                    </a:solidFill>
+                  </a:tcPr>
+                </a:tc>
+              </a:tr>
+              <a:tr h="310896">
+                <a:tc>
+                  <a:txBody>
+                    <a:bodyPr/>
+                    <a:lstStyle/>
+                    <a:p>
+                      <a:pPr algn="l">
+                        <a:defRPr>
+                          <a:latin typeface="Roboto"/>
+                        </a:defRPr>
+                      </a:pPr>
+                      <a:r>
+                        <a:rPr sz="1050">
+                          <a:solidFill>
+                            <a:srgbClr val="25342A"/>
+                          </a:solidFill>
+                          <a:latin typeface="Roboto"/>
+                        </a:rPr>
+                        <a:t>Share capital</a:t>
+                      </a:r>
+                    </a:p>
+                  </a:txBody>
+                  <a:tcPr>
+                    <a:solidFill>
+                      <a:srgbClr val="FFFFFF"/>
+                    </a:solidFill>
+                  </a:tcPr>
+                </a:tc>
+                <a:tc>
+                  <a:txBody>
+                    <a:bodyPr/>
+                    <a:lstStyle/>
+                    <a:p>
+                      <a:pPr algn="r">
+                        <a:defRPr>
+                          <a:latin typeface="Roboto"/>
+                        </a:defRPr>
+                      </a:pPr>
+                      <a:r>
+                        <a:rPr sz="1050">
+                          <a:solidFill>
+                            <a:srgbClr val="25342A"/>
+                          </a:solidFill>
+                          <a:latin typeface="Roboto"/>
+                        </a:rPr>
+                        <a:t>10,000</a:t>
+                      </a:r>
+                    </a:p>
+                  </a:txBody>
+                  <a:tcPr>
+                    <a:solidFill>
+                      <a:srgbClr val="FFFFFF"/>
+                    </a:solidFill>
+                  </a:tcPr>
+                </a:tc>
+                <a:tc>
+                  <a:txBody>
+                    <a:bodyPr/>
+                    <a:lstStyle/>
+                    <a:p>
+                      <a:pPr algn="r">
+                        <a:defRPr>
+                          <a:latin typeface="Roboto"/>
+                        </a:defRPr>
+                      </a:pPr>
+                      <a:r>
+                        <a:rPr sz="1050">
+                          <a:solidFill>
+                            <a:srgbClr val="25342A"/>
+                          </a:solidFill>
+                          <a:latin typeface="Roboto"/>
+                        </a:rPr>
+                        <a:t>10,000</a:t>
+                      </a:r>
+                    </a:p>
+                  </a:txBody>
+                  <a:tcPr>
+                    <a:solidFill>
+                      <a:srgbClr val="FFFFFF"/>
+                    </a:solidFill>
+                  </a:tcPr>
+                </a:tc>
+                <a:tc>
+                  <a:txBody>
+                    <a:bodyPr/>
+                    <a:lstStyle/>
+                    <a:p>
+                      <a:pPr algn="r">
+                        <a:defRPr>
+                          <a:latin typeface="Roboto"/>
+                        </a:defRPr>
+                      </a:pPr>
+                      <a:r>
+                        <a:rPr sz="1050">
+                          <a:solidFill>
+                            <a:srgbClr val="25342A"/>
+                          </a:solidFill>
+                          <a:latin typeface="Roboto"/>
+                        </a:rPr>
+                        <a:t>-</a:t>
+                      </a:r>
+                    </a:p>
+                  </a:txBody>
+                  <a:tcPr>
+                    <a:solidFill>
+                      <a:srgbClr val="FFFFFF"/>
+                    </a:solidFill>
+                  </a:tcPr>
+                </a:tc>
+              </a:tr>
+              <a:tr h="310896">
+                <a:tc>
+                  <a:txBody>
+                    <a:bodyPr/>
+                    <a:lstStyle/>
+                    <a:p>
+                      <a:pPr algn="l">
+                        <a:defRPr>
+                          <a:latin typeface="Roboto"/>
+                        </a:defRPr>
+                      </a:pPr>
+                      <a:r>
+                        <a:rPr sz="1050">
+                          <a:solidFill>
+                            <a:srgbClr val="25342A"/>
+                          </a:solidFill>
+                          <a:latin typeface="Roboto"/>
+                        </a:rPr>
+                        <a:t>Retained earnings</a:t>
+                      </a:r>
+                    </a:p>
+                  </a:txBody>
+                  <a:tcPr>
+                    <a:solidFill>
+                      <a:srgbClr val="F7FAF7"/>
+                    </a:solidFill>
+                  </a:tcPr>
+                </a:tc>
+                <a:tc>
+                  <a:txBody>
+                    <a:bodyPr/>
+                    <a:lstStyle/>
+                    <a:p>
+                      <a:pPr algn="r">
+                        <a:defRPr>
+                          <a:latin typeface="Roboto"/>
+                        </a:defRPr>
+                      </a:pPr>
+                      <a:r>
+                        <a:rPr sz="1050">
+                          <a:solidFill>
+                            <a:srgbClr val="25342A"/>
+                          </a:solidFill>
+                          <a:latin typeface="Roboto"/>
+                        </a:rPr>
+                        <a:t>193,200</a:t>
+                      </a:r>
+                    </a:p>
+                  </a:txBody>
+                  <a:tcPr>
+                    <a:solidFill>
+                      <a:srgbClr val="F7FAF7"/>
+                    </a:solidFill>
+                  </a:tcPr>
+                </a:tc>
+                <a:tc>
+                  <a:txBody>
+                    <a:bodyPr/>
+                    <a:lstStyle/>
+                    <a:p>
+                      <a:pPr algn="r">
+                        <a:defRPr>
+                          <a:latin typeface="Roboto"/>
+                        </a:defRPr>
+                      </a:pPr>
+                      <a:r>
+                        <a:rPr sz="1050">
+                          <a:solidFill>
+                            <a:srgbClr val="25342A"/>
+                          </a:solidFill>
+                          <a:latin typeface="Roboto"/>
+                        </a:rPr>
+                        <a:t>187,025</a:t>
+                      </a:r>
+                    </a:p>
+                  </a:txBody>
+                  <a:tcPr>
+                    <a:solidFill>
+                      <a:srgbClr val="F7FAF7"/>
+                    </a:solidFill>
+                  </a:tcPr>
+                </a:tc>
+                <a:tc>
+                  <a:txBody>
+                    <a:bodyPr/>
+                    <a:lstStyle/>
+                    <a:p>
+                      <a:pPr algn="r">
+                        <a:defRPr>
+                          <a:latin typeface="Roboto"/>
+                        </a:defRPr>
+                      </a:pPr>
+                      <a:r>
+                        <a:rPr sz="1050">
+                          <a:solidFill>
+                            <a:srgbClr val="25342A"/>
+                          </a:solidFill>
+                          <a:latin typeface="Roboto"/>
+                        </a:rPr>
+                        <a:t>6,175</a:t>
+                      </a:r>
+                    </a:p>
+                  </a:txBody>
+                  <a:tcPr>
+                    <a:solidFill>
+                      <a:srgbClr val="F7FAF7"/>
+                    </a:solidFill>
+                  </a:tcPr>
+                </a:tc>
+              </a:tr>
+              <a:tr h="310896">
+                <a:tc>
+                  <a:txBody>
+                    <a:bodyPr/>
+                    <a:lstStyle/>
+                    <a:p>
+                      <a:pPr algn="l">
+                        <a:defRPr>
+                          <a:latin typeface="Roboto"/>
+                        </a:defRPr>
+                      </a:pPr>
+                      <a:r>
+                        <a:rPr sz="1050" b="1">
+                          <a:solidFill>
+                            <a:srgbClr val="25342A"/>
+                          </a:solidFill>
+                          <a:latin typeface="Roboto"/>
+                        </a:rPr>
                         <a:t>Total equity</a:t>
                       </a:r>
                     </a:p>
@@ -8096,7 +8607,7 @@
                           </a:solidFill>
                           <a:latin typeface="Roboto"/>
                         </a:rPr>
-                        <a:t>238,906</a:t>
+                        <a:t>203,200</a:t>
                       </a:r>
                     </a:p>
                   </a:txBody>
@@ -8123,7 +8634,7 @@
                           </a:solidFill>
                           <a:latin typeface="Roboto"/>
                         </a:rPr>
-                        <a:t>231,333</a:t>
+                        <a:t>197,025</a:t>
                       </a:r>
                     </a:p>
                   </a:txBody>
@@ -8150,7 +8661,7 @@
                           </a:solidFill>
                           <a:latin typeface="Roboto"/>
                         </a:rPr>
-                        <a:t>7,573</a:t>
+                        <a:t>6,175</a:t>
                       </a:r>
                     </a:p>
                   </a:txBody>
@@ -8238,7 +8749,7 @@
                 </a:solidFill>
                 <a:latin typeface="Roboto"/>
               </a:rPr>
-              <a:t>Data retrieved 2pm, Tue 6 Oct 2026 · Generated 8 Oct 2026, 9:30pm · Sample data · Made with Python (python-pptx)</a:t>
+              <a:t>Data retrieved 2pm, Tue 6 Oct 2026 · Generated 9 Oct 2026, 8:39am · Sample data · Made with Python (python-pptx)</a:t>
             </a:r>
           </a:p>
         </p:txBody>
@@ -8277,7 +8788,7 @@
                 </a:solidFill>
                 <a:latin typeface="Roboto"/>
               </a:rPr>
-              <a:t>Slide 11 of 18</a:t>
+              <a:t>Slide 11 of 19</a:t>
             </a:r>
           </a:p>
         </p:txBody>
@@ -8602,7 +9113,7 @@
                           </a:solidFill>
                           <a:latin typeface="Roboto"/>
                         </a:rPr>
-                        <a:t>181,093</a:t>
+                        <a:t>222,094</a:t>
                       </a:r>
                     </a:p>
                   </a:txBody>
@@ -8629,7 +9140,7 @@
                           </a:solidFill>
                           <a:latin typeface="Roboto"/>
                         </a:rPr>
-                        <a:t>156,273</a:t>
+                        <a:t>191,442</a:t>
                       </a:r>
                     </a:p>
                   </a:txBody>
@@ -8656,7 +9167,7 @@
                           </a:solidFill>
                           <a:latin typeface="Roboto"/>
                         </a:rPr>
-                        <a:t>24,820</a:t>
+                        <a:t>30,652</a:t>
                       </a:r>
                     </a:p>
                   </a:txBody>
@@ -8712,7 +9223,7 @@
                           </a:solidFill>
                           <a:latin typeface="Roboto"/>
                         </a:rPr>
-                        <a:t>(92,930)</a:t>
+                        <a:t>(102,223)</a:t>
                       </a:r>
                     </a:p>
                   </a:txBody>
@@ -8739,7 +9250,7 @@
                           </a:solidFill>
                           <a:latin typeface="Roboto"/>
                         </a:rPr>
-                        <a:t>(97,510)</a:t>
+                        <a:t>(107,261)</a:t>
                       </a:r>
                     </a:p>
                   </a:txBody>
@@ -8766,7 +9277,7 @@
                           </a:solidFill>
                           <a:latin typeface="Roboto"/>
                         </a:rPr>
-                        <a:t>4,580</a:t>
+                        <a:t>5,038</a:t>
                       </a:r>
                     </a:p>
                   </a:txBody>
@@ -8822,7 +9333,7 @@
                           </a:solidFill>
                           <a:latin typeface="Roboto"/>
                         </a:rPr>
-                        <a:t>(75,600)</a:t>
+                        <a:t>(73,222)</a:t>
                       </a:r>
                     </a:p>
                   </a:txBody>
@@ -8849,7 +9360,7 @@
                           </a:solidFill>
                           <a:latin typeface="Roboto"/>
                         </a:rPr>
-                        <a:t>(75,400)</a:t>
+                        <a:t>(73,222)</a:t>
                       </a:r>
                     </a:p>
                   </a:txBody>
@@ -8872,11 +9383,11 @@
                       <a:r>
                         <a:rPr sz="1050">
                           <a:solidFill>
-                            <a:srgbClr val="B42318"/>
-                          </a:solidFill>
-                          <a:latin typeface="Roboto"/>
-                        </a:rPr>
-                        <a:t>(200)</a:t>
+                            <a:srgbClr val="25342A"/>
+                          </a:solidFill>
+                          <a:latin typeface="Roboto"/>
+                        </a:rPr>
+                        <a:t>-</a:t>
                       </a:r>
                     </a:p>
                   </a:txBody>
@@ -9015,7 +9526,7 @@
                           </a:solidFill>
                           <a:latin typeface="Roboto"/>
                         </a:rPr>
-                        <a:t>Income tax paid</a:t>
+                        <a:t>GST, PAYG and income tax paid (BAS)</a:t>
                       </a:r>
                     </a:p>
                   </a:txBody>
@@ -9152,7 +9663,7 @@
                           </a:solidFill>
                           <a:latin typeface="Roboto"/>
                         </a:rPr>
-                        <a:t>11,483</a:t>
+                        <a:t>45,569</a:t>
                       </a:r>
                     </a:p>
                   </a:txBody>
@@ -9175,11 +9686,11 @@
                       <a:r>
                         <a:rPr sz="1050">
                           <a:solidFill>
-                            <a:srgbClr val="B42318"/>
-                          </a:solidFill>
-                          <a:latin typeface="Roboto"/>
-                        </a:rPr>
-                        <a:t>(17,737)</a:t>
+                            <a:srgbClr val="25342A"/>
+                          </a:solidFill>
+                          <a:latin typeface="Roboto"/>
+                        </a:rPr>
+                        <a:t>9,859</a:t>
                       </a:r>
                     </a:p>
                   </a:txBody>
@@ -9206,7 +9717,7 @@
                           </a:solidFill>
                           <a:latin typeface="Roboto"/>
                         </a:rPr>
-                        <a:t>29,220</a:t>
+                        <a:t>35,710</a:t>
                       </a:r>
                     </a:p>
                   </a:txBody>
@@ -9262,7 +9773,7 @@
                           </a:solidFill>
                           <a:latin typeface="Roboto"/>
                         </a:rPr>
-                        <a:t>(12,000)</a:t>
+                        <a:t>(13,200)</a:t>
                       </a:r>
                     </a:p>
                   </a:txBody>
@@ -9316,7 +9827,7 @@
                           </a:solidFill>
                           <a:latin typeface="Roboto"/>
                         </a:rPr>
-                        <a:t>(12,000)</a:t>
+                        <a:t>(13,200)</a:t>
                       </a:r>
                     </a:p>
                   </a:txBody>
@@ -9372,7 +9883,7 @@
                           </a:solidFill>
                           <a:latin typeface="Roboto"/>
                         </a:rPr>
-                        <a:t>(12,000)</a:t>
+                        <a:t>(13,200)</a:t>
                       </a:r>
                     </a:p>
                   </a:txBody>
@@ -9426,7 +9937,7 @@
                           </a:solidFill>
                           <a:latin typeface="Roboto"/>
                         </a:rPr>
-                        <a:t>(12,000)</a:t>
+                        <a:t>(13,200)</a:t>
                       </a:r>
                     </a:p>
                   </a:txBody>
@@ -9698,11 +10209,11 @@
                       <a:r>
                         <a:rPr sz="1050">
                           <a:solidFill>
-                            <a:srgbClr val="B42318"/>
-                          </a:solidFill>
-                          <a:latin typeface="Roboto"/>
-                        </a:rPr>
-                        <a:t>(5,517)</a:t>
+                            <a:srgbClr val="25342A"/>
+                          </a:solidFill>
+                          <a:latin typeface="Roboto"/>
+                        </a:rPr>
+                        <a:t>27,369</a:t>
                       </a:r>
                     </a:p>
                   </a:txBody>
@@ -9725,11 +10236,11 @@
                       <a:r>
                         <a:rPr sz="1050">
                           <a:solidFill>
-                            <a:srgbClr val="B42318"/>
-                          </a:solidFill>
-                          <a:latin typeface="Roboto"/>
-                        </a:rPr>
-                        <a:t>(22,737)</a:t>
+                            <a:srgbClr val="25342A"/>
+                          </a:solidFill>
+                          <a:latin typeface="Roboto"/>
+                        </a:rPr>
+                        <a:t>4,859</a:t>
                       </a:r>
                     </a:p>
                   </a:txBody>
@@ -9756,7 +10267,7 @@
                           </a:solidFill>
                           <a:latin typeface="Roboto"/>
                         </a:rPr>
-                        <a:t>17,220</a:t>
+                        <a:t>22,510</a:t>
                       </a:r>
                     </a:p>
                   </a:txBody>
@@ -9812,7 +10323,7 @@
                           </a:solidFill>
                           <a:latin typeface="Roboto"/>
                         </a:rPr>
-                        <a:t>65,263</a:t>
+                        <a:t>92,859</a:t>
                       </a:r>
                     </a:p>
                   </a:txBody>
@@ -9862,11 +10373,11 @@
                       <a:r>
                         <a:rPr sz="1050">
                           <a:solidFill>
-                            <a:srgbClr val="B42318"/>
-                          </a:solidFill>
-                          <a:latin typeface="Roboto"/>
-                        </a:rPr>
-                        <a:t>(22,737)</a:t>
+                            <a:srgbClr val="25342A"/>
+                          </a:solidFill>
+                          <a:latin typeface="Roboto"/>
+                        </a:rPr>
+                        <a:t>4,859</a:t>
                       </a:r>
                     </a:p>
                   </a:txBody>
@@ -9922,7 +10433,7 @@
                           </a:solidFill>
                           <a:latin typeface="Roboto"/>
                         </a:rPr>
-                        <a:t>59,746</a:t>
+                        <a:t>120,228</a:t>
                       </a:r>
                     </a:p>
                   </a:txBody>
@@ -9949,7 +10460,7 @@
                           </a:solidFill>
                           <a:latin typeface="Roboto"/>
                         </a:rPr>
-                        <a:t>65,263</a:t>
+                        <a:t>92,859</a:t>
                       </a:r>
                     </a:p>
                   </a:txBody>
@@ -9972,11 +10483,11 @@
                       <a:r>
                         <a:rPr sz="1050" b="1">
                           <a:solidFill>
-                            <a:srgbClr val="B42318"/>
-                          </a:solidFill>
-                          <a:latin typeface="Roboto"/>
-                        </a:rPr>
-                        <a:t>(5,517)</a:t>
+                            <a:srgbClr val="25342A"/>
+                          </a:solidFill>
+                          <a:latin typeface="Roboto"/>
+                        </a:rPr>
+                        <a:t>27,369</a:t>
                       </a:r>
                     </a:p>
                   </a:txBody>
@@ -10064,7 +10575,7 @@
                 </a:solidFill>
                 <a:latin typeface="Roboto"/>
               </a:rPr>
-              <a:t>Data retrieved 2pm, Tue 6 Oct 2026 · Generated 8 Oct 2026, 9:30pm · Sample data · Made with Python (python-pptx)</a:t>
+              <a:t>Data retrieved 2pm, Tue 6 Oct 2026 · Generated 9 Oct 2026, 8:39am · Sample data · Made with Python (python-pptx)</a:t>
             </a:r>
           </a:p>
         </p:txBody>
@@ -10103,7 +10614,7 @@
                 </a:solidFill>
                 <a:latin typeface="Roboto"/>
               </a:rPr>
-              <a:t>Slide 12 of 18</a:t>
+              <a:t>Slide 12 of 19</a:t>
             </a:r>
           </a:p>
         </p:txBody>
@@ -10567,7 +11078,7 @@
                           </a:solidFill>
                           <a:latin typeface="Roboto"/>
                         </a:rPr>
-                        <a:t>9,800</a:t>
+                        <a:t>11,000</a:t>
                       </a:r>
                     </a:p>
                   </a:txBody>
@@ -10675,7 +11186,7 @@
                           </a:solidFill>
                           <a:latin typeface="Roboto"/>
                         </a:rPr>
-                        <a:t>4,432</a:t>
+                        <a:t>5,632</a:t>
                       </a:r>
                     </a:p>
                   </a:txBody>
@@ -10702,7 +11213,7 @@
                           </a:solidFill>
                           <a:latin typeface="Roboto"/>
                         </a:rPr>
-                        <a:t>45.2</a:t>
+                        <a:t>51.2</a:t>
                       </a:r>
                     </a:p>
                   </a:txBody>
@@ -10785,7 +11296,7 @@
                           </a:solidFill>
                           <a:latin typeface="Roboto"/>
                         </a:rPr>
-                        <a:t>27,400</a:t>
+                        <a:t>30,700</a:t>
                       </a:r>
                     </a:p>
                   </a:txBody>
@@ -10893,7 +11404,7 @@
                           </a:solidFill>
                           <a:latin typeface="Roboto"/>
                         </a:rPr>
-                        <a:t>7,372</a:t>
+                        <a:t>10,672</a:t>
                       </a:r>
                     </a:p>
                   </a:txBody>
@@ -10920,7 +11431,7 @@
                           </a:solidFill>
                           <a:latin typeface="Roboto"/>
                         </a:rPr>
-                        <a:t>26.9</a:t>
+                        <a:t>34.8</a:t>
                       </a:r>
                     </a:p>
                   </a:txBody>
@@ -11003,7 +11514,7 @@
                           </a:solidFill>
                           <a:latin typeface="Roboto"/>
                         </a:rPr>
-                        <a:t>15,200</a:t>
+                        <a:t>17,000</a:t>
                       </a:r>
                     </a:p>
                   </a:txBody>
@@ -11111,7 +11622,7 @@
                           </a:solidFill>
                           <a:latin typeface="Roboto"/>
                         </a:rPr>
-                        <a:t>5,564</a:t>
+                        <a:t>7,364</a:t>
                       </a:r>
                     </a:p>
                   </a:txBody>
@@ -11138,7 +11649,7 @@
                           </a:solidFill>
                           <a:latin typeface="Roboto"/>
                         </a:rPr>
-                        <a:t>36.6</a:t>
+                        <a:t>43.3</a:t>
                       </a:r>
                     </a:p>
                   </a:txBody>
@@ -11221,7 +11732,7 @@
                           </a:solidFill>
                           <a:latin typeface="Roboto"/>
                         </a:rPr>
-                        <a:t>18,600</a:t>
+                        <a:t>20,800</a:t>
                       </a:r>
                     </a:p>
                   </a:txBody>
@@ -11329,7 +11840,7 @@
                           </a:solidFill>
                           <a:latin typeface="Roboto"/>
                         </a:rPr>
-                        <a:t>7,348</a:t>
+                        <a:t>9,548</a:t>
                       </a:r>
                     </a:p>
                   </a:txBody>
@@ -11356,7 +11867,7 @@
                           </a:solidFill>
                           <a:latin typeface="Roboto"/>
                         </a:rPr>
-                        <a:t>39.5</a:t>
+                        <a:t>45.9</a:t>
                       </a:r>
                     </a:p>
                   </a:txBody>
@@ -11439,7 +11950,7 @@
                           </a:solidFill>
                           <a:latin typeface="Roboto"/>
                         </a:rPr>
-                        <a:t>46,800</a:t>
+                        <a:t>52,400</a:t>
                       </a:r>
                     </a:p>
                   </a:txBody>
@@ -11547,7 +12058,7 @@
                           </a:solidFill>
                           <a:latin typeface="Roboto"/>
                         </a:rPr>
-                        <a:t>6,300</a:t>
+                        <a:t>11,900</a:t>
                       </a:r>
                     </a:p>
                   </a:txBody>
@@ -11574,7 +12085,7 @@
                           </a:solidFill>
                           <a:latin typeface="Roboto"/>
                         </a:rPr>
-                        <a:t>13.5</a:t>
+                        <a:t>22.7</a:t>
                       </a:r>
                     </a:p>
                   </a:txBody>
@@ -11657,7 +12168,7 @@
                           </a:solidFill>
                           <a:latin typeface="Roboto"/>
                         </a:rPr>
-                        <a:t>12,900</a:t>
+                        <a:t>14,400</a:t>
                       </a:r>
                     </a:p>
                   </a:txBody>
@@ -11765,7 +12276,7 @@
                           </a:solidFill>
                           <a:latin typeface="Roboto"/>
                         </a:rPr>
-                        <a:t>4,316</a:t>
+                        <a:t>5,816</a:t>
                       </a:r>
                     </a:p>
                   </a:txBody>
@@ -11792,7 +12303,7 @@
                           </a:solidFill>
                           <a:latin typeface="Roboto"/>
                         </a:rPr>
-                        <a:t>33.5</a:t>
+                        <a:t>40.4</a:t>
                       </a:r>
                     </a:p>
                   </a:txBody>
@@ -11875,7 +12386,7 @@
                           </a:solidFill>
                           <a:latin typeface="Roboto"/>
                         </a:rPr>
-                        <a:t>3,600</a:t>
+                        <a:t>4,050</a:t>
                       </a:r>
                     </a:p>
                   </a:txBody>
@@ -11983,7 +12494,7 @@
                           </a:solidFill>
                           <a:latin typeface="Roboto"/>
                         </a:rPr>
-                        <a:t>2,160</a:t>
+                        <a:t>2,610</a:t>
                       </a:r>
                     </a:p>
                   </a:txBody>
@@ -12010,7 +12521,7 @@
                           </a:solidFill>
                           <a:latin typeface="Roboto"/>
                         </a:rPr>
-                        <a:t>60.0</a:t>
+                        <a:t>64.4</a:t>
                       </a:r>
                     </a:p>
                   </a:txBody>
@@ -12093,7 +12604,7 @@
                           </a:solidFill>
                           <a:latin typeface="Roboto"/>
                         </a:rPr>
-                        <a:t>2,800</a:t>
+                        <a:t>3,150</a:t>
                       </a:r>
                     </a:p>
                   </a:txBody>
@@ -12201,7 +12712,7 @@
                           </a:solidFill>
                           <a:latin typeface="Roboto"/>
                         </a:rPr>
-                        <a:t>1,652</a:t>
+                        <a:t>2,002</a:t>
                       </a:r>
                     </a:p>
                   </a:txBody>
@@ -12228,7 +12739,7 @@
                           </a:solidFill>
                           <a:latin typeface="Roboto"/>
                         </a:rPr>
-                        <a:t>59.0</a:t>
+                        <a:t>63.6</a:t>
                       </a:r>
                     </a:p>
                   </a:txBody>
@@ -12311,7 +12822,7 @@
                           </a:solidFill>
                           <a:latin typeface="Roboto"/>
                         </a:rPr>
-                        <a:t>1,700</a:t>
+                        <a:t>1,900</a:t>
                       </a:r>
                     </a:p>
                   </a:txBody>
@@ -12419,7 +12930,7 @@
                           </a:solidFill>
                           <a:latin typeface="Roboto"/>
                         </a:rPr>
-                        <a:t>1,058</a:t>
+                        <a:t>1,258</a:t>
                       </a:r>
                     </a:p>
                   </a:txBody>
@@ -12446,7 +12957,7 @@
                           </a:solidFill>
                           <a:latin typeface="Roboto"/>
                         </a:rPr>
-                        <a:t>62.2</a:t>
+                        <a:t>66.2</a:t>
                       </a:r>
                     </a:p>
                   </a:txBody>
@@ -12529,7 +13040,7 @@
                           </a:solidFill>
                           <a:latin typeface="Roboto"/>
                         </a:rPr>
-                        <a:t>4,100</a:t>
+                        <a:t>4,600</a:t>
                       </a:r>
                     </a:p>
                   </a:txBody>
@@ -12637,7 +13148,7 @@
                           </a:solidFill>
                           <a:latin typeface="Roboto"/>
                         </a:rPr>
-                        <a:t>2,436</a:t>
+                        <a:t>2,936</a:t>
                       </a:r>
                     </a:p>
                   </a:txBody>
@@ -12664,7 +13175,7 @@
                           </a:solidFill>
                           <a:latin typeface="Roboto"/>
                         </a:rPr>
-                        <a:t>59.4</a:t>
+                        <a:t>63.8</a:t>
                       </a:r>
                     </a:p>
                   </a:txBody>
@@ -12747,7 +13258,7 @@
                           </a:solidFill>
                           <a:latin typeface="Roboto"/>
                         </a:rPr>
-                        <a:t>3,400</a:t>
+                        <a:t>3,800</a:t>
                       </a:r>
                     </a:p>
                   </a:txBody>
@@ -12855,7 +13366,7 @@
                           </a:solidFill>
                           <a:latin typeface="Roboto"/>
                         </a:rPr>
-                        <a:t>2,038</a:t>
+                        <a:t>2,438</a:t>
                       </a:r>
                     </a:p>
                   </a:txBody>
@@ -12882,7 +13393,7 @@
                           </a:solidFill>
                           <a:latin typeface="Roboto"/>
                         </a:rPr>
-                        <a:t>59.9</a:t>
+                        <a:t>64.2</a:t>
                       </a:r>
                     </a:p>
                   </a:txBody>
@@ -12965,7 +13476,7 @@
                           </a:solidFill>
                           <a:latin typeface="Roboto"/>
                         </a:rPr>
-                        <a:t>2,400</a:t>
+                        <a:t>2,700</a:t>
                       </a:r>
                     </a:p>
                   </a:txBody>
@@ -13073,7 +13584,7 @@
                           </a:solidFill>
                           <a:latin typeface="Roboto"/>
                         </a:rPr>
-                        <a:t>1,398</a:t>
+                        <a:t>1,698</a:t>
                       </a:r>
                     </a:p>
                   </a:txBody>
@@ -13100,7 +13611,7 @@
                           </a:solidFill>
                           <a:latin typeface="Roboto"/>
                         </a:rPr>
-                        <a:t>58.2</a:t>
+                        <a:t>62.9</a:t>
                       </a:r>
                     </a:p>
                   </a:txBody>
@@ -13183,7 +13694,7 @@
                           </a:solidFill>
                           <a:latin typeface="Roboto"/>
                         </a:rPr>
-                        <a:t>4,200</a:t>
+                        <a:t>4,700</a:t>
                       </a:r>
                     </a:p>
                   </a:txBody>
@@ -13291,7 +13802,7 @@
                           </a:solidFill>
                           <a:latin typeface="Roboto"/>
                         </a:rPr>
-                        <a:t>2,478</a:t>
+                        <a:t>2,978</a:t>
                       </a:r>
                     </a:p>
                   </a:txBody>
@@ -13318,7 +13829,7 @@
                           </a:solidFill>
                           <a:latin typeface="Roboto"/>
                         </a:rPr>
-                        <a:t>59.0</a:t>
+                        <a:t>63.4</a:t>
                       </a:r>
                     </a:p>
                   </a:txBody>
@@ -13401,7 +13912,7 @@
                           </a:solidFill>
                           <a:latin typeface="Roboto"/>
                         </a:rPr>
-                        <a:t>1,600</a:t>
+                        <a:t>1,800</a:t>
                       </a:r>
                     </a:p>
                   </a:txBody>
@@ -13509,7 +14020,7 @@
                           </a:solidFill>
                           <a:latin typeface="Roboto"/>
                         </a:rPr>
-                        <a:t>958</a:t>
+                        <a:t>1,158</a:t>
                       </a:r>
                     </a:p>
                   </a:txBody>
@@ -13536,7 +14047,7 @@
                           </a:solidFill>
                           <a:latin typeface="Roboto"/>
                         </a:rPr>
-                        <a:t>59.9</a:t>
+                        <a:t>64.3</a:t>
                       </a:r>
                     </a:p>
                   </a:txBody>
@@ -13624,7 +14135,7 @@
                 </a:solidFill>
                 <a:latin typeface="Roboto"/>
               </a:rPr>
-              <a:t>Data retrieved 2pm, Tue 6 Oct 2026 · Generated 8 Oct 2026, 9:30pm · Sample data · Made with Python (python-pptx)</a:t>
+              <a:t>Data retrieved 2pm, Tue 6 Oct 2026 · Generated 9 Oct 2026, 8:39am · Sample data · Made with Python (python-pptx)</a:t>
             </a:r>
           </a:p>
         </p:txBody>
@@ -13663,7 +14174,7 @@
                 </a:solidFill>
                 <a:latin typeface="Roboto"/>
               </a:rPr>
-              <a:t>Slide 13 of 18</a:t>
+              <a:t>Slide 13 of 19</a:t>
             </a:r>
           </a:p>
         </p:txBody>
@@ -14127,7 +14638,7 @@
                           </a:solidFill>
                           <a:latin typeface="Roboto"/>
                         </a:rPr>
-                        <a:t>3,200</a:t>
+                        <a:t>3,600</a:t>
                       </a:r>
                     </a:p>
                   </a:txBody>
@@ -14235,7 +14746,7 @@
                           </a:solidFill>
                           <a:latin typeface="Roboto"/>
                         </a:rPr>
-                        <a:t>1,916</a:t>
+                        <a:t>2,316</a:t>
                       </a:r>
                     </a:p>
                   </a:txBody>
@@ -14262,7 +14773,7 @@
                           </a:solidFill>
                           <a:latin typeface="Roboto"/>
                         </a:rPr>
-                        <a:t>59.9</a:t>
+                        <a:t>64.3</a:t>
                       </a:r>
                     </a:p>
                   </a:txBody>
@@ -14345,7 +14856,7 @@
                           </a:solidFill>
                           <a:latin typeface="Roboto"/>
                         </a:rPr>
-                        <a:t>3,900</a:t>
+                        <a:t>4,350</a:t>
                       </a:r>
                     </a:p>
                   </a:txBody>
@@ -14453,7 +14964,7 @@
                           </a:solidFill>
                           <a:latin typeface="Roboto"/>
                         </a:rPr>
-                        <a:t>2,294</a:t>
+                        <a:t>2,744</a:t>
                       </a:r>
                     </a:p>
                   </a:txBody>
@@ -14480,7 +14991,7 @@
                           </a:solidFill>
                           <a:latin typeface="Roboto"/>
                         </a:rPr>
-                        <a:t>58.8</a:t>
+                        <a:t>63.1</a:t>
                       </a:r>
                     </a:p>
                   </a:txBody>
@@ -14563,7 +15074,7 @@
                           </a:solidFill>
                           <a:latin typeface="Roboto"/>
                         </a:rPr>
-                        <a:t>1,800</a:t>
+                        <a:t>2,000</a:t>
                       </a:r>
                     </a:p>
                   </a:txBody>
@@ -14671,7 +15182,7 @@
                           </a:solidFill>
                           <a:latin typeface="Roboto"/>
                         </a:rPr>
-                        <a:t>1,080</a:t>
+                        <a:t>1,280</a:t>
                       </a:r>
                     </a:p>
                   </a:txBody>
@@ -14698,7 +15209,7 @@
                           </a:solidFill>
                           <a:latin typeface="Roboto"/>
                         </a:rPr>
-                        <a:t>60.0</a:t>
+                        <a:t>64.0</a:t>
                       </a:r>
                     </a:p>
                   </a:txBody>
@@ -14781,7 +15292,7 @@
                           </a:solidFill>
                           <a:latin typeface="Roboto"/>
                         </a:rPr>
-                        <a:t>3,000</a:t>
+                        <a:t>3,350</a:t>
                       </a:r>
                     </a:p>
                   </a:txBody>
@@ -14889,7 +15400,7 @@
                           </a:solidFill>
                           <a:latin typeface="Roboto"/>
                         </a:rPr>
-                        <a:t>1,774</a:t>
+                        <a:t>2,124</a:t>
                       </a:r>
                     </a:p>
                   </a:txBody>
@@ -14916,7 +15427,7 @@
                           </a:solidFill>
                           <a:latin typeface="Roboto"/>
                         </a:rPr>
-                        <a:t>59.1</a:t>
+                        <a:t>63.4</a:t>
                       </a:r>
                     </a:p>
                   </a:txBody>
@@ -14999,7 +15510,7 @@
                           </a:solidFill>
                           <a:latin typeface="Roboto"/>
                         </a:rPr>
-                        <a:t>2,600</a:t>
+                        <a:t>2,900</a:t>
                       </a:r>
                     </a:p>
                   </a:txBody>
@@ -15107,7 +15618,7 @@
                           </a:solidFill>
                           <a:latin typeface="Roboto"/>
                         </a:rPr>
-                        <a:t>1,530</a:t>
+                        <a:t>1,830</a:t>
                       </a:r>
                     </a:p>
                   </a:txBody>
@@ -15134,7 +15645,7 @@
                           </a:solidFill>
                           <a:latin typeface="Roboto"/>
                         </a:rPr>
-                        <a:t>58.8</a:t>
+                        <a:t>63.1</a:t>
                       </a:r>
                     </a:p>
                   </a:txBody>
@@ -15217,7 +15728,7 @@
                           </a:solidFill>
                           <a:latin typeface="Roboto"/>
                         </a:rPr>
-                        <a:t>2,200</a:t>
+                        <a:t>2,450</a:t>
                       </a:r>
                     </a:p>
                   </a:txBody>
@@ -15325,7 +15836,7 @@
                           </a:solidFill>
                           <a:latin typeface="Roboto"/>
                         </a:rPr>
-                        <a:t>1,344</a:t>
+                        <a:t>1,594</a:t>
                       </a:r>
                     </a:p>
                   </a:txBody>
@@ -15352,7 +15863,7 @@
                           </a:solidFill>
                           <a:latin typeface="Roboto"/>
                         </a:rPr>
-                        <a:t>61.1</a:t>
+                        <a:t>65.1</a:t>
                       </a:r>
                     </a:p>
                   </a:txBody>
@@ -15435,7 +15946,7 @@
                           </a:solidFill>
                           <a:latin typeface="Roboto"/>
                         </a:rPr>
-                        <a:t>31,137</a:t>
+                        <a:t>33,810</a:t>
                       </a:r>
                     </a:p>
                   </a:txBody>
@@ -15543,7 +16054,7 @@
                           </a:solidFill>
                           <a:latin typeface="Roboto"/>
                         </a:rPr>
-                        <a:t>13,659</a:t>
+                        <a:t>16,332</a:t>
                       </a:r>
                     </a:p>
                   </a:txBody>
@@ -15570,7 +16081,7 @@
                           </a:solidFill>
                           <a:latin typeface="Roboto"/>
                         </a:rPr>
-                        <a:t>43.9</a:t>
+                        <a:t>48.3</a:t>
                       </a:r>
                     </a:p>
                   </a:txBody>
@@ -15658,7 +16169,7 @@
                 </a:solidFill>
                 <a:latin typeface="Roboto"/>
               </a:rPr>
-              <a:t>Data retrieved 2pm, Tue 6 Oct 2026 · Generated 8 Oct 2026, 9:30pm · Sample data · Made with Python (python-pptx)</a:t>
+              <a:t>Data retrieved 2pm, Tue 6 Oct 2026 · Generated 9 Oct 2026, 8:39am · Sample data · Made with Python (python-pptx)</a:t>
             </a:r>
           </a:p>
         </p:txBody>
@@ -15697,7 +16208,7 @@
                 </a:solidFill>
                 <a:latin typeface="Roboto"/>
               </a:rPr>
-              <a:t>Slide 14 of 18</a:t>
+              <a:t>Slide 14 of 19</a:t>
             </a:r>
           </a:p>
         </p:txBody>
@@ -16110,7 +16621,7 @@
                 </a:solidFill>
                 <a:latin typeface="Roboto"/>
               </a:rPr>
-              <a:t>Data retrieved 2pm, Tue 6 Oct 2026 · Generated 8 Oct 2026, 9:30pm · Sample data · Made with Python (python-pptx)</a:t>
+              <a:t>Data retrieved 2pm, Tue 6 Oct 2026 · Generated 9 Oct 2026, 8:39am · Sample data · Made with Python (python-pptx)</a:t>
             </a:r>
           </a:p>
         </p:txBody>
@@ -16149,7 +16660,7 @@
                 </a:solidFill>
                 <a:latin typeface="Roboto"/>
               </a:rPr>
-              <a:t>Slide 15 of 18</a:t>
+              <a:t>Slide 15 of 19</a:t>
             </a:r>
           </a:p>
         </p:txBody>
@@ -16474,7 +16985,7 @@
                           </a:solidFill>
                           <a:latin typeface="Roboto"/>
                         </a:rPr>
-                        <a:t>64 jobs at $145/hour plus materials marked up 30%</a:t>
+                        <a:t>64 jobs at $163/hour plus materials marked up 30%</a:t>
                       </a:r>
                     </a:p>
                   </a:txBody>
@@ -16618,7 +17129,7 @@
                 </a:solidFill>
                 <a:latin typeface="Roboto"/>
               </a:rPr>
-              <a:t>Data retrieved 2pm, Tue 6 Oct 2026 · Generated 8 Oct 2026, 9:30pm · Sample data · Made with Python (python-pptx)</a:t>
+              <a:t>Data retrieved 2pm, Tue 6 Oct 2026 · Generated 9 Oct 2026, 8:39am · Sample data · Made with Python (python-pptx)</a:t>
             </a:r>
           </a:p>
         </p:txBody>
@@ -16657,7 +17168,7 @@
                 </a:solidFill>
                 <a:latin typeface="Roboto"/>
               </a:rPr>
-              <a:t>Slide 16 of 18</a:t>
+              <a:t>Slide 16 of 19</a:t>
             </a:r>
           </a:p>
         </p:txBody>
@@ -16870,7 +17381,7 @@
                           </a:solidFill>
                           <a:latin typeface="Roboto"/>
                         </a:rPr>
-                        <a:t>7 on salary: $54,600 a month incl. on-costs</a:t>
+                        <a:t>7 employed full time: $79,587 in September incl. on-costs (every available hour at $68)</a:t>
                       </a:r>
                     </a:p>
                   </a:txBody>
@@ -16926,7 +17437,7 @@
                           </a:solidFill>
                           <a:latin typeface="Roboto"/>
                         </a:rPr>
-                        <a:t>$68/hour for technician time charged to a job</a:t>
+                        <a:t>$68/hour = technician wages incl. on-costs ÷ available hours, worked out each month; time charged to jobs + time not charged = technician wages</a:t>
                       </a:r>
                     </a:p>
                   </a:txBody>
@@ -16982,7 +17493,7 @@
                           </a:solidFill>
                           <a:latin typeface="Roboto"/>
                         </a:rPr>
-                        <a:t>20 in August (Ekka show holiday), 22 in September; 7.6 hours a day</a:t>
+                        <a:t>20 in August (21 weekdays, less the Ekka People's Day holiday, Wed 12 Aug), 22 in September; 7.6 hours a day</a:t>
                       </a:r>
                     </a:p>
                   </a:txBody>
@@ -17094,7 +17605,7 @@
                           </a:solidFill>
                           <a:latin typeface="Roboto"/>
                         </a:rPr>
-                        <a:t>25% of profit, provided monthly; next PAYG instalment due October</a:t>
+                        <a:t>25% of profit, provided monthly; the PAYG instalment is paid with each quarter's BAS</a:t>
                       </a:r>
                     </a:p>
                   </a:txBody>
@@ -17182,7 +17693,7 @@
                 </a:solidFill>
                 <a:latin typeface="Roboto"/>
               </a:rPr>
-              <a:t>Data retrieved 2pm, Tue 6 Oct 2026 · Generated 8 Oct 2026, 9:30pm · Sample data · Made with Python (python-pptx)</a:t>
+              <a:t>Data retrieved 2pm, Tue 6 Oct 2026 · Generated 9 Oct 2026, 8:39am · Sample data · Made with Python (python-pptx)</a:t>
             </a:r>
           </a:p>
         </p:txBody>
@@ -17221,7 +17732,7 @@
                 </a:solidFill>
                 <a:latin typeface="Roboto"/>
               </a:rPr>
-              <a:t>Slide 17 of 18</a:t>
+              <a:t>Slide 17 of 19</a:t>
             </a:r>
           </a:p>
         </p:txBody>
@@ -17377,7 +17888,7 @@
         </p:nvGraphicFramePr>
         <p:xfrm>
           <a:off x="457200" y="960120"/>
-          <a:ext cx="11277294" cy="1554480"/>
+          <a:ext cx="11277294" cy="1243584"/>
         </p:xfrm>
         <a:graphic>
           <a:graphicData uri="http://schemas.openxmlformats.org/drawingml/2006/table">
@@ -17609,62 +18120,6 @@
                   <a:tcPr>
                     <a:solidFill>
                       <a:srgbClr val="F7FAF7"/>
-                    </a:solidFill>
-                  </a:tcPr>
-                </a:tc>
-              </a:tr>
-              <a:tr h="310896">
-                <a:tc>
-                  <a:txBody>
-                    <a:bodyPr/>
-                    <a:lstStyle/>
-                    <a:p>
-                      <a:pPr algn="l">
-                        <a:defRPr>
-                          <a:latin typeface="Roboto"/>
-                        </a:defRPr>
-                      </a:pPr>
-                      <a:r>
-                        <a:rPr sz="1050">
-                          <a:solidFill>
-                            <a:srgbClr val="25342A"/>
-                          </a:solidFill>
-                          <a:latin typeface="Roboto"/>
-                        </a:rPr>
-                        <a:t>GST</a:t>
-                      </a:r>
-                    </a:p>
-                  </a:txBody>
-                  <a:tcPr>
-                    <a:solidFill>
-                      <a:srgbClr val="FFFFFF"/>
-                    </a:solidFill>
-                  </a:tcPr>
-                </a:tc>
-                <a:tc>
-                  <a:txBody>
-                    <a:bodyPr/>
-                    <a:lstStyle/>
-                    <a:p>
-                      <a:pPr algn="l">
-                        <a:defRPr>
-                          <a:latin typeface="Roboto"/>
-                        </a:defRPr>
-                      </a:pPr>
-                      <a:r>
-                        <a:rPr sz="1050">
-                          <a:solidFill>
-                            <a:srgbClr val="25342A"/>
-                          </a:solidFill>
-                          <a:latin typeface="Roboto"/>
-                        </a:rPr>
-                        <a:t>excluded throughout, for simplicity</a:t>
-                      </a:r>
-                    </a:p>
-                  </a:txBody>
-                  <a:tcPr>
-                    <a:solidFill>
-                      <a:srgbClr val="FFFFFF"/>
                     </a:solidFill>
                   </a:tcPr>
                 </a:tc>
@@ -17746,7 +18201,7 @@
                 </a:solidFill>
                 <a:latin typeface="Roboto"/>
               </a:rPr>
-              <a:t>Data retrieved 2pm, Tue 6 Oct 2026 · Generated 8 Oct 2026, 9:30pm · Sample data · Made with Python (python-pptx)</a:t>
+              <a:t>Data retrieved 2pm, Tue 6 Oct 2026 · Generated 9 Oct 2026, 8:39am · Sample data · Made with Python (python-pptx)</a:t>
             </a:r>
           </a:p>
         </p:txBody>
@@ -17785,7 +18240,627 @@
                 </a:solidFill>
                 <a:latin typeface="Roboto"/>
               </a:rPr>
-              <a:t>Slide 18 of 18</a:t>
+              <a:t>Slide 18 of 19</a:t>
+            </a:r>
+          </a:p>
+        </p:txBody>
+      </p:sp>
+    </p:spTree>
+  </p:cSld>
+  <p:clrMapOvr>
+    <a:masterClrMapping/>
+  </p:clrMapOvr>
+</p:sld>
+</file>
+
+<file path=ppt/slides/slide19.xml><?xml version="1.0" encoding="utf-8"?>
+<p:sld xmlns:a="http://schemas.openxmlformats.org/drawingml/2006/main" xmlns:p="http://schemas.openxmlformats.org/presentationml/2006/main" xmlns:r="http://schemas.openxmlformats.org/officeDocument/2006/relationships">
+  <p:cSld>
+    <p:spTree>
+      <p:nvGrpSpPr>
+        <p:cNvPr id="1" name=""/>
+        <p:cNvGrpSpPr/>
+        <p:nvPr/>
+      </p:nvGrpSpPr>
+      <p:grpSpPr/>
+      <p:sp>
+        <p:nvSpPr>
+          <p:cNvPr id="2" name="Title 1"/>
+          <p:cNvSpPr>
+            <a:spLocks noGrp="1"/>
+          </p:cNvSpPr>
+          <p:nvPr>
+            <p:ph type="title"/>
+          </p:nvPr>
+        </p:nvSpPr>
+        <p:spPr>
+          <a:xfrm>
+            <a:off x="457200" y="384048"/>
+            <a:ext cx="11277295" cy="475488"/>
+          </a:xfrm>
+        </p:spPr>
+        <p:txBody>
+          <a:bodyPr wrap="square" lIns="45720" rIns="45720" tIns="0" bIns="0" anchor="t"/>
+          <a:lstStyle/>
+          <a:p>
+            <a:pPr algn="l">
+              <a:defRPr>
+                <a:latin typeface="Roboto"/>
+              </a:defRPr>
+            </a:pPr>
+            <a:r>
+              <a:rPr sz="2400" b="1">
+                <a:solidFill>
+                  <a:srgbClr val="25342A"/>
+                </a:solidFill>
+                <a:latin typeface="Roboto"/>
+              </a:rPr>
+              <a:t>Assumptions: GST, BAS and payroll</a:t>
+            </a:r>
+          </a:p>
+        </p:txBody>
+      </p:sp>
+      <p:sp>
+        <p:nvSpPr>
+          <p:cNvPr id="3" name="Rectangle 2"/>
+          <p:cNvSpPr/>
+          <p:nvPr/>
+        </p:nvSpPr>
+        <p:spPr>
+          <a:xfrm>
+            <a:off x="0" y="0"/>
+            <a:ext cx="12191695" cy="73152"/>
+          </a:xfrm>
+          <a:prstGeom prst="rect">
+            <a:avLst/>
+          </a:prstGeom>
+          <a:solidFill>
+            <a:srgbClr val="2F7A5D"/>
+          </a:solidFill>
+          <a:ln>
+            <a:noFill/>
+          </a:ln>
+        </p:spPr>
+        <p:style>
+          <a:lnRef idx="1">
+            <a:schemeClr val="accent1"/>
+          </a:lnRef>
+          <a:fillRef idx="3">
+            <a:schemeClr val="accent1"/>
+          </a:fillRef>
+          <a:effectRef idx="2">
+            <a:schemeClr val="accent1"/>
+          </a:effectRef>
+          <a:fontRef idx="minor">
+            <a:schemeClr val="lt1"/>
+          </a:fontRef>
+        </p:style>
+        <p:txBody>
+          <a:bodyPr rtlCol="0" anchor="ctr"/>
+          <a:lstStyle/>
+          <a:p>
+            <a:pPr algn="ctr">
+              <a:defRPr>
+                <a:latin typeface="Roboto"/>
+              </a:defRPr>
+            </a:pPr>
+          </a:p>
+        </p:txBody>
+      </p:sp>
+      <p:sp>
+        <p:nvSpPr>
+          <p:cNvPr id="4" name="TextBox 3"/>
+          <p:cNvSpPr txBox="1"/>
+          <p:nvPr/>
+        </p:nvSpPr>
+        <p:spPr>
+          <a:xfrm>
+            <a:off x="457200" y="146304"/>
+            <a:ext cx="8229600" cy="256032"/>
+          </a:xfrm>
+          <a:prstGeom prst="rect">
+            <a:avLst/>
+          </a:prstGeom>
+          <a:noFill/>
+        </p:spPr>
+        <p:txBody>
+          <a:bodyPr wrap="square" lIns="45720" rIns="45720">
+            <a:spAutoFit/>
+          </a:bodyPr>
+          <a:lstStyle/>
+          <a:p>
+            <a:pPr>
+              <a:defRPr>
+                <a:latin typeface="Roboto"/>
+              </a:defRPr>
+            </a:pPr>
+            <a:r>
+              <a:rPr sz="1000" b="0">
+                <a:solidFill>
+                  <a:srgbClr val="5F6F63"/>
+                </a:solidFill>
+                <a:latin typeface="Roboto"/>
+              </a:rPr>
+              <a:t>Sample Electrical &amp; Air Pty Ltd · Monthly report pack, September 2026</a:t>
+            </a:r>
+          </a:p>
+        </p:txBody>
+      </p:sp>
+      <p:graphicFrame>
+        <p:nvGraphicFramePr>
+          <p:cNvPr id="5" name="Table 4"/>
+          <p:cNvGraphicFramePr>
+            <a:graphicFrameLocks noGrp="1"/>
+          </p:cNvGraphicFramePr>
+          <p:nvPr/>
+        </p:nvGraphicFramePr>
+        <p:xfrm>
+          <a:off x="457200" y="960120"/>
+          <a:ext cx="11277294" cy="1865376"/>
+        </p:xfrm>
+        <a:graphic>
+          <a:graphicData uri="http://schemas.openxmlformats.org/drawingml/2006/table">
+            <a:tbl>
+              <a:tblPr bandRow="1">
+                <a:tableStyleId>{5C22544A-7EE6-4342-B048-85BDC9FD1C3A}</a:tableStyleId>
+              </a:tblPr>
+              <a:tblGrid>
+                <a:gridCol w="3608734"/>
+                <a:gridCol w="7668560"/>
+              </a:tblGrid>
+              <a:tr h="310896">
+                <a:tc>
+                  <a:txBody>
+                    <a:bodyPr/>
+                    <a:lstStyle/>
+                    <a:p>
+                      <a:pPr algn="l">
+                        <a:defRPr>
+                          <a:latin typeface="Roboto"/>
+                        </a:defRPr>
+                      </a:pPr>
+                      <a:r>
+                        <a:rPr sz="1050">
+                          <a:solidFill>
+                            <a:srgbClr val="25342A"/>
+                          </a:solidFill>
+                          <a:latin typeface="Roboto"/>
+                        </a:rPr>
+                        <a:t>GST</a:t>
+                      </a:r>
+                    </a:p>
+                  </a:txBody>
+                  <a:tcPr>
+                    <a:solidFill>
+                      <a:srgbClr val="FFFFFF"/>
+                    </a:solidFill>
+                  </a:tcPr>
+                </a:tc>
+                <a:tc>
+                  <a:txBody>
+                    <a:bodyPr/>
+                    <a:lstStyle/>
+                    <a:p>
+                      <a:pPr algn="l">
+                        <a:defRPr>
+                          <a:latin typeface="Roboto"/>
+                        </a:defRPr>
+                      </a:pPr>
+                      <a:r>
+                        <a:rPr sz="1050">
+                          <a:solidFill>
+                            <a:srgbClr val="25342A"/>
+                          </a:solidFill>
+                          <a:latin typeface="Roboto"/>
+                        </a:rPr>
+                        <a:t>registered; 10%, accruals basis: GST on a sale is owed when it's invoiced, a credit on a bill is claimed when it's received. The P&amp;L excludes GST; invoices, bills, debtors, creditors and cash include it</a:t>
+                      </a:r>
+                    </a:p>
+                  </a:txBody>
+                  <a:tcPr>
+                    <a:solidFill>
+                      <a:srgbClr val="FFFFFF"/>
+                    </a:solidFill>
+                  </a:tcPr>
+                </a:tc>
+              </a:tr>
+              <a:tr h="310896">
+                <a:tc>
+                  <a:txBody>
+                    <a:bodyPr/>
+                    <a:lstStyle/>
+                    <a:p>
+                      <a:pPr algn="l">
+                        <a:defRPr>
+                          <a:latin typeface="Roboto"/>
+                        </a:defRPr>
+                      </a:pPr>
+                      <a:r>
+                        <a:rPr sz="1050">
+                          <a:solidFill>
+                            <a:srgbClr val="25342A"/>
+                          </a:solidFill>
+                          <a:latin typeface="Roboto"/>
+                        </a:rPr>
+                        <a:t>BAS</a:t>
+                      </a:r>
+                    </a:p>
+                  </a:txBody>
+                  <a:tcPr>
+                    <a:solidFill>
+                      <a:srgbClr val="F7FAF7"/>
+                    </a:solidFill>
+                  </a:tcPr>
+                </a:tc>
+                <a:tc>
+                  <a:txBody>
+                    <a:bodyPr/>
+                    <a:lstStyle/>
+                    <a:p>
+                      <a:pPr algn="l">
+                        <a:defRPr>
+                          <a:latin typeface="Roboto"/>
+                        </a:defRPr>
+                      </a:pPr>
+                      <a:r>
+                        <a:rPr sz="1050">
+                          <a:solidFill>
+                            <a:srgbClr val="25342A"/>
+                          </a:solidFill>
+                          <a:latin typeface="Roboto"/>
+                        </a:rPr>
+                        <a:t>quarterly, self-lodged: GST on sales − GST credits + PAYG withheld + PAYG instalment. July to September is due 28 October; October to December, 28 February</a:t>
+                      </a:r>
+                    </a:p>
+                  </a:txBody>
+                  <a:tcPr>
+                    <a:solidFill>
+                      <a:srgbClr val="F7FAF7"/>
+                    </a:solidFill>
+                  </a:tcPr>
+                </a:tc>
+              </a:tr>
+              <a:tr h="310896">
+                <a:tc>
+                  <a:txBody>
+                    <a:bodyPr/>
+                    <a:lstStyle/>
+                    <a:p>
+                      <a:pPr algn="l">
+                        <a:defRPr>
+                          <a:latin typeface="Roboto"/>
+                        </a:defRPr>
+                      </a:pPr>
+                      <a:r>
+                        <a:rPr sz="1050">
+                          <a:solidFill>
+                            <a:srgbClr val="25342A"/>
+                          </a:solidFill>
+                          <a:latin typeface="Roboto"/>
+                        </a:rPr>
+                        <a:t>Pay runs</a:t>
+                      </a:r>
+                    </a:p>
+                  </a:txBody>
+                  <a:tcPr>
+                    <a:solidFill>
+                      <a:srgbClr val="FFFFFF"/>
+                    </a:solidFill>
+                  </a:tcPr>
+                </a:tc>
+                <a:tc>
+                  <a:txBody>
+                    <a:bodyPr/>
+                    <a:lstStyle/>
+                    <a:p>
+                      <a:pPr algn="l">
+                        <a:defRPr>
+                          <a:latin typeface="Roboto"/>
+                        </a:defRPr>
+                      </a:pPr>
+                      <a:r>
+                        <a:rPr sz="1050">
+                          <a:solidFill>
+                            <a:srgbClr val="25342A"/>
+                          </a:solidFill>
+                          <a:latin typeface="Roboto"/>
+                        </a:rPr>
+                        <a:t>fortnightly on Thursdays: $39,795 gross (a 26th of the year's gross wages); net pay $31,836 and super $4,775 paid on the day; PAYG withheld (about 20% of gross, $7,959) goes with the BAS. Two months a year have three pay runs</a:t>
+                      </a:r>
+                    </a:p>
+                  </a:txBody>
+                  <a:tcPr>
+                    <a:solidFill>
+                      <a:srgbClr val="FFFFFF"/>
+                    </a:solidFill>
+                  </a:tcPr>
+                </a:tc>
+              </a:tr>
+              <a:tr h="310896">
+                <a:tc>
+                  <a:txBody>
+                    <a:bodyPr/>
+                    <a:lstStyle/>
+                    <a:p>
+                      <a:pPr algn="l">
+                        <a:defRPr>
+                          <a:latin typeface="Roboto"/>
+                        </a:defRPr>
+                      </a:pPr>
+                      <a:r>
+                        <a:rPr sz="1050">
+                          <a:solidFill>
+                            <a:srgbClr val="25342A"/>
+                          </a:solidFill>
+                          <a:latin typeface="Roboto"/>
+                        </a:rPr>
+                        <a:t>Super</a:t>
+                      </a:r>
+                    </a:p>
+                  </a:txBody>
+                  <a:tcPr>
+                    <a:solidFill>
+                      <a:srgbClr val="F7FAF7"/>
+                    </a:solidFill>
+                  </a:tcPr>
+                </a:tc>
+                <a:tc>
+                  <a:txBody>
+                    <a:bodyPr/>
+                    <a:lstStyle/>
+                    <a:p>
+                      <a:pPr algn="l">
+                        <a:defRPr>
+                          <a:latin typeface="Roboto"/>
+                        </a:defRPr>
+                      </a:pPr>
+                      <a:r>
+                        <a:rPr sz="1050">
+                          <a:solidFill>
+                            <a:srgbClr val="25342A"/>
+                          </a:solidFill>
+                          <a:latin typeface="Roboto"/>
+                        </a:rPr>
+                        <a:t>12% of gross wages, paid with each pay run (Payday Super, from 1 July 2026)</a:t>
+                      </a:r>
+                    </a:p>
+                  </a:txBody>
+                  <a:tcPr>
+                    <a:solidFill>
+                      <a:srgbClr val="F7FAF7"/>
+                    </a:solidFill>
+                  </a:tcPr>
+                </a:tc>
+              </a:tr>
+              <a:tr h="310896">
+                <a:tc>
+                  <a:txBody>
+                    <a:bodyPr/>
+                    <a:lstStyle/>
+                    <a:p>
+                      <a:pPr algn="l">
+                        <a:defRPr>
+                          <a:latin typeface="Roboto"/>
+                        </a:defRPr>
+                      </a:pPr>
+                      <a:r>
+                        <a:rPr sz="1050">
+                          <a:solidFill>
+                            <a:srgbClr val="25342A"/>
+                          </a:solidFill>
+                          <a:latin typeface="Roboto"/>
+                        </a:rPr>
+                        <a:t>Payroll tax</a:t>
+                      </a:r>
+                    </a:p>
+                  </a:txBody>
+                  <a:tcPr>
+                    <a:solidFill>
+                      <a:srgbClr val="FFFFFF"/>
+                    </a:solidFill>
+                  </a:tcPr>
+                </a:tc>
+                <a:tc>
+                  <a:txBody>
+                    <a:bodyPr/>
+                    <a:lstStyle/>
+                    <a:p>
+                      <a:pPr algn="l">
+                        <a:defRPr>
+                          <a:latin typeface="Roboto"/>
+                        </a:defRPr>
+                      </a:pPr>
+                      <a:r>
+                        <a:rPr sz="1050">
+                          <a:solidFill>
+                            <a:srgbClr val="25342A"/>
+                          </a:solidFill>
+                          <a:latin typeface="Roboto"/>
+                        </a:rPr>
+                        <a:t>none: Queensland's threshold is $1.3 million of wages a year (rate 4.75% above it); this business pays about $1,159,000 including super</a:t>
+                      </a:r>
+                    </a:p>
+                  </a:txBody>
+                  <a:tcPr>
+                    <a:solidFill>
+                      <a:srgbClr val="FFFFFF"/>
+                    </a:solidFill>
+                  </a:tcPr>
+                </a:tc>
+              </a:tr>
+              <a:tr h="310896">
+                <a:tc>
+                  <a:txBody>
+                    <a:bodyPr/>
+                    <a:lstStyle/>
+                    <a:p>
+                      <a:pPr algn="l">
+                        <a:defRPr>
+                          <a:latin typeface="Roboto"/>
+                        </a:defRPr>
+                      </a:pPr>
+                      <a:r>
+                        <a:rPr sz="1050">
+                          <a:solidFill>
+                            <a:srgbClr val="25342A"/>
+                          </a:solidFill>
+                          <a:latin typeface="Roboto"/>
+                        </a:rPr>
+                        <a:t>Banking days</a:t>
+                      </a:r>
+                    </a:p>
+                  </a:txBody>
+                  <a:tcPr>
+                    <a:solidFill>
+                      <a:srgbClr val="F7FAF7"/>
+                    </a:solidFill>
+                  </a:tcPr>
+                </a:tc>
+                <a:tc>
+                  <a:txBody>
+                    <a:bodyPr/>
+                    <a:lstStyle/>
+                    <a:p>
+                      <a:pPr algn="l">
+                        <a:defRPr>
+                          <a:latin typeface="Roboto"/>
+                        </a:defRPr>
+                      </a:pPr>
+                      <a:r>
+                        <a:rPr sz="1050">
+                          <a:solidFill>
+                            <a:srgbClr val="25342A"/>
+                          </a:solidFill>
+                          <a:latin typeface="Roboto"/>
+                        </a:rPr>
+                        <a:t>money only moves on banking days: a payment due on a weekend or Queensland public holiday moves to the next banking day</a:t>
+                      </a:r>
+                    </a:p>
+                  </a:txBody>
+                  <a:tcPr>
+                    <a:solidFill>
+                      <a:srgbClr val="F7FAF7"/>
+                    </a:solidFill>
+                  </a:tcPr>
+                </a:tc>
+              </a:tr>
+            </a:tbl>
+          </a:graphicData>
+        </a:graphic>
+      </p:graphicFrame>
+      <p:sp>
+        <p:nvSpPr>
+          <p:cNvPr id="6" name="TextBox 5"/>
+          <p:cNvSpPr txBox="1"/>
+          <p:nvPr/>
+        </p:nvSpPr>
+        <p:spPr>
+          <a:xfrm>
+            <a:off x="457200" y="6492240"/>
+            <a:ext cx="2926080" cy="274320"/>
+          </a:xfrm>
+          <a:prstGeom prst="rect">
+            <a:avLst/>
+          </a:prstGeom>
+          <a:noFill/>
+        </p:spPr>
+        <p:txBody>
+          <a:bodyPr wrap="square" lIns="45720" rIns="45720">
+            <a:spAutoFit/>
+          </a:bodyPr>
+          <a:lstStyle/>
+          <a:p>
+            <a:pPr>
+              <a:defRPr>
+                <a:latin typeface="Roboto"/>
+              </a:defRPr>
+            </a:pPr>
+            <a:r>
+              <a:rPr sz="900" b="0">
+                <a:solidFill>
+                  <a:srgbClr val="5F6F63"/>
+                </a:solidFill>
+                <a:latin typeface="Roboto"/>
+              </a:rPr>
+              <a:t>trades-sample-statements.pptx</a:t>
+            </a:r>
+          </a:p>
+        </p:txBody>
+      </p:sp>
+      <p:sp>
+        <p:nvSpPr>
+          <p:cNvPr id="7" name="TextBox 6"/>
+          <p:cNvSpPr txBox="1"/>
+          <p:nvPr/>
+        </p:nvSpPr>
+        <p:spPr>
+          <a:xfrm>
+            <a:off x="3108960" y="6492240"/>
+            <a:ext cx="5943600" cy="274320"/>
+          </a:xfrm>
+          <a:prstGeom prst="rect">
+            <a:avLst/>
+          </a:prstGeom>
+          <a:noFill/>
+        </p:spPr>
+        <p:txBody>
+          <a:bodyPr wrap="square" lIns="45720" rIns="45720">
+            <a:spAutoFit/>
+          </a:bodyPr>
+          <a:lstStyle/>
+          <a:p>
+            <a:pPr algn="ctr">
+              <a:defRPr>
+                <a:latin typeface="Roboto"/>
+              </a:defRPr>
+            </a:pPr>
+            <a:r>
+              <a:rPr sz="900" b="0">
+                <a:solidFill>
+                  <a:srgbClr val="5F6F63"/>
+                </a:solidFill>
+                <a:latin typeface="Roboto"/>
+              </a:rPr>
+              <a:t>Data retrieved 2pm, Tue 6 Oct 2026 · Generated 9 Oct 2026, 8:39am · Sample data · Made with Python (python-pptx)</a:t>
+            </a:r>
+          </a:p>
+        </p:txBody>
+      </p:sp>
+      <p:sp>
+        <p:nvSpPr>
+          <p:cNvPr id="8" name="TextBox 7"/>
+          <p:cNvSpPr txBox="1"/>
+          <p:nvPr/>
+        </p:nvSpPr>
+        <p:spPr>
+          <a:xfrm>
+            <a:off x="8503920" y="6492240"/>
+            <a:ext cx="3200400" cy="274320"/>
+          </a:xfrm>
+          <a:prstGeom prst="rect">
+            <a:avLst/>
+          </a:prstGeom>
+          <a:noFill/>
+        </p:spPr>
+        <p:txBody>
+          <a:bodyPr wrap="square" lIns="45720" rIns="45720">
+            <a:spAutoFit/>
+          </a:bodyPr>
+          <a:lstStyle/>
+          <a:p>
+            <a:pPr algn="r">
+              <a:defRPr>
+                <a:latin typeface="Roboto"/>
+              </a:defRPr>
+            </a:pPr>
+            <a:r>
+              <a:rPr sz="900" b="0">
+                <a:solidFill>
+                  <a:srgbClr val="5F6F63"/>
+                </a:solidFill>
+                <a:latin typeface="Roboto"/>
+              </a:rPr>
+              <a:t>Slide 19 of 19</a:t>
             </a:r>
           </a:p>
         </p:txBody>
@@ -18053,7 +19128,7 @@
                 </a:solidFill>
                 <a:latin typeface="Roboto"/>
               </a:rPr>
-              <a:t>34.4%</a:t>
+              <a:t>30.1%</a:t>
             </a:r>
           </a:p>
         </p:txBody>
@@ -18092,7 +19167,7 @@
                 </a:solidFill>
                 <a:latin typeface="Roboto"/>
               </a:rPr>
-              <a:t>▼ from 35.5% in Aug</a:t>
+              <a:t>▼ from 33.2% in Aug</a:t>
             </a:r>
           </a:p>
         </p:txBody>
@@ -18502,7 +19577,7 @@
                 </a:solidFill>
                 <a:latin typeface="Roboto"/>
               </a:rPr>
-              <a:t>Data retrieved 2pm, Tue 6 Oct 2026 · Generated 8 Oct 2026, 9:30pm · Sample data · Made with Python (python-pptx)</a:t>
+              <a:t>Data retrieved 2pm, Tue 6 Oct 2026 · Generated 9 Oct 2026, 8:39am · Sample data · Made with Python (python-pptx)</a:t>
             </a:r>
           </a:p>
         </p:txBody>
@@ -18541,7 +19616,7 @@
                 </a:solidFill>
                 <a:latin typeface="Roboto"/>
               </a:rPr>
-              <a:t>Slide 2 of 18</a:t>
+              <a:t>Slide 2 of 19</a:t>
             </a:r>
           </a:p>
         </p:txBody>
@@ -18752,7 +19827,7 @@
         </p:nvCxnSpPr>
         <p:spPr>
           <a:xfrm>
-            <a:off x="8244564" y="1599255"/>
+            <a:off x="7728450" y="1599255"/>
             <a:ext cx="0" cy="3816827"/>
           </a:xfrm>
           <a:prstGeom prst="line">
@@ -18788,7 +19863,7 @@
         </p:nvSpPr>
         <p:spPr>
           <a:xfrm>
-            <a:off x="7147284" y="5416082"/>
+            <a:off x="6631170" y="5416082"/>
             <a:ext cx="2194560" cy="237744"/>
           </a:xfrm>
           <a:prstGeom prst="rect">
@@ -18931,7 +20006,7 @@
                 </a:solidFill>
                 <a:latin typeface="Roboto"/>
               </a:rPr>
-              <a:t>Data retrieved 2pm, Tue 6 Oct 2026 · Generated 8 Oct 2026, 9:30pm · Sample data · Made with Python (python-pptx)</a:t>
+              <a:t>Data retrieved 2pm, Tue 6 Oct 2026 · Generated 9 Oct 2026, 8:39am · Sample data · Made with Python (python-pptx)</a:t>
             </a:r>
           </a:p>
         </p:txBody>
@@ -18970,7 +20045,7 @@
                 </a:solidFill>
                 <a:latin typeface="Roboto"/>
               </a:rPr>
-              <a:t>Slide 3 of 18</a:t>
+              <a:t>Slide 3 of 19</a:t>
             </a:r>
           </a:p>
         </p:txBody>
@@ -19285,7 +20360,7 @@
                 </a:solidFill>
                 <a:latin typeface="Roboto"/>
               </a:rPr>
-              <a:t>Data retrieved 2pm, Tue 6 Oct 2026 · Generated 8 Oct 2026, 9:30pm · Sample data · Made with Python (python-pptx)</a:t>
+              <a:t>Data retrieved 2pm, Tue 6 Oct 2026 · Generated 9 Oct 2026, 8:39am · Sample data · Made with Python (python-pptx)</a:t>
             </a:r>
           </a:p>
         </p:txBody>
@@ -19324,7 +20399,7 @@
                 </a:solidFill>
                 <a:latin typeface="Roboto"/>
               </a:rPr>
-              <a:t>Slide 4 of 18</a:t>
+              <a:t>Slide 4 of 19</a:t>
             </a:r>
           </a:p>
         </p:txBody>
@@ -19651,7 +20726,7 @@
                           </a:solidFill>
                           <a:latin typeface="Roboto"/>
                         </a:rPr>
-                        <a:t>$202,337</a:t>
+                        <a:t>$225,460</a:t>
                       </a:r>
                     </a:p>
                   </a:txBody>
@@ -19678,7 +20753,7 @@
                           </a:solidFill>
                           <a:latin typeface="Roboto"/>
                         </a:rPr>
-                        <a:t>$179,007</a:t>
+                        <a:t>$199,523</a:t>
                       </a:r>
                     </a:p>
                   </a:txBody>
@@ -19900,7 +20975,7 @@
                           </a:solidFill>
                           <a:latin typeface="Roboto"/>
                         </a:rPr>
-                        <a:t>($54,600)</a:t>
+                        <a:t>($79,587)</a:t>
                       </a:r>
                     </a:p>
                   </a:txBody>
@@ -19927,7 +21002,7 @@
                           </a:solidFill>
                           <a:latin typeface="Roboto"/>
                         </a:rPr>
-                        <a:t>($54,600)</a:t>
+                        <a:t>($72,352)</a:t>
                       </a:r>
                     </a:p>
                   </a:txBody>
@@ -19983,7 +21058,7 @@
                           </a:solidFill>
                           <a:latin typeface="Roboto"/>
                         </a:rPr>
-                        <a:t>$69,677</a:t>
+                        <a:t>$67,813</a:t>
                       </a:r>
                     </a:p>
                   </a:txBody>
@@ -20010,7 +21085,7 @@
                           </a:solidFill>
                           <a:latin typeface="Roboto"/>
                         </a:rPr>
-                        <a:t>$63,577</a:t>
+                        <a:t>$66,341</a:t>
                       </a:r>
                     </a:p>
                   </a:txBody>
@@ -20066,7 +21141,7 @@
                           </a:solidFill>
                           <a:latin typeface="Roboto"/>
                         </a:rPr>
-                        <a:t>34.4%</a:t>
+                        <a:t>30.1%</a:t>
                       </a:r>
                     </a:p>
                   </a:txBody>
@@ -20093,7 +21168,7 @@
                           </a:solidFill>
                           <a:latin typeface="Roboto"/>
                         </a:rPr>
-                        <a:t>35.5%</a:t>
+                        <a:t>33.2%</a:t>
                       </a:r>
                     </a:p>
                   </a:txBody>
@@ -20181,7 +21256,7 @@
                 </a:solidFill>
                 <a:latin typeface="Roboto"/>
               </a:rPr>
-              <a:t>Data retrieved 2pm, Tue 6 Oct 2026 · Generated 8 Oct 2026, 9:30pm · Sample data · Made with Python (python-pptx)</a:t>
+              <a:t>Data retrieved 2pm, Tue 6 Oct 2026 · Generated 9 Oct 2026, 8:39am · Sample data · Made with Python (python-pptx)</a:t>
             </a:r>
           </a:p>
         </p:txBody>
@@ -20220,7 +21295,7 @@
                 </a:solidFill>
                 <a:latin typeface="Roboto"/>
               </a:rPr>
-              <a:t>Slide 5 of 18</a:t>
+              <a:t>Slide 5 of 19</a:t>
             </a:r>
           </a:p>
         </p:txBody>
@@ -20828,7 +21903,7 @@
                 </a:solidFill>
                 <a:latin typeface="Roboto"/>
               </a:rPr>
-              <a:t>Data retrieved 2pm, Tue 6 Oct 2026 · Generated 8 Oct 2026, 9:30pm · Sample data · Made with Python (python-pptx)</a:t>
+              <a:t>Data retrieved 2pm, Tue 6 Oct 2026 · Generated 9 Oct 2026, 8:39am · Sample data · Made with Python (python-pptx)</a:t>
             </a:r>
           </a:p>
         </p:txBody>
@@ -20867,7 +21942,7 @@
                 </a:solidFill>
                 <a:latin typeface="Roboto"/>
               </a:rPr>
-              <a:t>Slide 6 of 18</a:t>
+              <a:t>Slide 6 of 19</a:t>
             </a:r>
           </a:p>
         </p:txBody>
@@ -21724,7 +22799,7 @@
                 </a:solidFill>
                 <a:latin typeface="Roboto"/>
               </a:rPr>
-              <a:t>Data retrieved 2pm, Tue 6 Oct 2026 · Generated 8 Oct 2026, 9:30pm · Sample data · Made with Python (python-pptx)</a:t>
+              <a:t>Data retrieved 2pm, Tue 6 Oct 2026 · Generated 9 Oct 2026, 8:39am · Sample data · Made with Python (python-pptx)</a:t>
             </a:r>
           </a:p>
         </p:txBody>
@@ -21763,7 +22838,7 @@
                 </a:solidFill>
                 <a:latin typeface="Roboto"/>
               </a:rPr>
-              <a:t>Slide 7 of 18</a:t>
+              <a:t>Slide 7 of 19</a:t>
             </a:r>
           </a:p>
         </p:txBody>
@@ -22088,7 +23163,7 @@
                           </a:solidFill>
                           <a:latin typeface="Roboto"/>
                         </a:rPr>
-                        <a:t>40,500</a:t>
+                        <a:t>45,350</a:t>
                       </a:r>
                     </a:p>
                   </a:txBody>
@@ -22115,7 +23190,7 @@
                           </a:solidFill>
                           <a:latin typeface="Roboto"/>
                         </a:rPr>
-                        <a:t>40,500</a:t>
+                        <a:t>45,350</a:t>
                       </a:r>
                     </a:p>
                   </a:txBody>
@@ -22198,7 +23273,7 @@
                           </a:solidFill>
                           <a:latin typeface="Roboto"/>
                         </a:rPr>
-                        <a:t>130,700</a:t>
+                        <a:t>146,300</a:t>
                       </a:r>
                     </a:p>
                   </a:txBody>
@@ -22225,7 +23300,7 @@
                           </a:solidFill>
                           <a:latin typeface="Roboto"/>
                         </a:rPr>
-                        <a:t>109,600</a:t>
+                        <a:t>122,800</a:t>
                       </a:r>
                     </a:p>
                   </a:txBody>
@@ -22252,7 +23327,7 @@
                           </a:solidFill>
                           <a:latin typeface="Roboto"/>
                         </a:rPr>
-                        <a:t>21,100</a:t>
+                        <a:t>23,500</a:t>
                       </a:r>
                     </a:p>
                   </a:txBody>
@@ -22308,7 +23383,7 @@
                           </a:solidFill>
                           <a:latin typeface="Roboto"/>
                         </a:rPr>
-                        <a:t>21,543</a:t>
+                        <a:t>24,216</a:t>
                       </a:r>
                     </a:p>
                   </a:txBody>
@@ -22335,7 +23410,7 @@
                           </a:solidFill>
                           <a:latin typeface="Roboto"/>
                         </a:rPr>
-                        <a:t>19,872</a:t>
+                        <a:t>22,338</a:t>
                       </a:r>
                     </a:p>
                   </a:txBody>
@@ -22362,7 +23437,7 @@
                           </a:solidFill>
                           <a:latin typeface="Roboto"/>
                         </a:rPr>
-                        <a:t>1,671</a:t>
+                        <a:t>1,878</a:t>
                       </a:r>
                     </a:p>
                   </a:txBody>
@@ -22528,7 +23603,7 @@
                           </a:solidFill>
                           <a:latin typeface="Roboto"/>
                         </a:rPr>
-                        <a:t>202,337</a:t>
+                        <a:t>225,460</a:t>
                       </a:r>
                     </a:p>
                   </a:txBody>
@@ -22555,7 +23630,7 @@
                           </a:solidFill>
                           <a:latin typeface="Roboto"/>
                         </a:rPr>
-                        <a:t>179,007</a:t>
+                        <a:t>199,523</a:t>
                       </a:r>
                     </a:p>
                   </a:txBody>
@@ -22582,7 +23657,7 @@
                           </a:solidFill>
                           <a:latin typeface="Roboto"/>
                         </a:rPr>
-                        <a:t>23,330</a:t>
+                        <a:t>25,937</a:t>
                       </a:r>
                     </a:p>
                   </a:txBody>
@@ -22858,7 +23933,7 @@
                           </a:solidFill>
                           <a:latin typeface="Roboto"/>
                         </a:rPr>
-                        <a:t>(54,600)</a:t>
+                        <a:t>(79,587)</a:t>
                       </a:r>
                     </a:p>
                   </a:txBody>
@@ -22885,7 +23960,7 @@
                           </a:solidFill>
                           <a:latin typeface="Roboto"/>
                         </a:rPr>
-                        <a:t>(54,600)</a:t>
+                        <a:t>(72,352)</a:t>
                       </a:r>
                     </a:p>
                   </a:txBody>
@@ -22908,11 +23983,11 @@
                       <a:r>
                         <a:rPr sz="1050">
                           <a:solidFill>
-                            <a:srgbClr val="25342A"/>
-                          </a:solidFill>
-                          <a:latin typeface="Roboto"/>
-                        </a:rPr>
-                        <a:t>-</a:t>
+                            <a:srgbClr val="B42318"/>
+                          </a:solidFill>
+                          <a:latin typeface="Roboto"/>
+                        </a:rPr>
+                        <a:t>(7,235)</a:t>
                       </a:r>
                     </a:p>
                   </a:txBody>
@@ -22968,7 +24043,7 @@
                           </a:solidFill>
                           <a:latin typeface="Roboto"/>
                         </a:rPr>
-                        <a:t>(132,660)</a:t>
+                        <a:t>(157,647)</a:t>
                       </a:r>
                     </a:p>
                   </a:txBody>
@@ -22995,7 +24070,7 @@
                           </a:solidFill>
                           <a:latin typeface="Roboto"/>
                         </a:rPr>
-                        <a:t>(115,430)</a:t>
+                        <a:t>(133,182)</a:t>
                       </a:r>
                     </a:p>
                   </a:txBody>
@@ -23022,7 +24097,7 @@
                           </a:solidFill>
                           <a:latin typeface="Roboto"/>
                         </a:rPr>
-                        <a:t>(17,230)</a:t>
+                        <a:t>(24,465)</a:t>
                       </a:r>
                     </a:p>
                   </a:txBody>
@@ -23078,7 +24153,7 @@
                           </a:solidFill>
                           <a:latin typeface="Roboto"/>
                         </a:rPr>
-                        <a:t>69,677</a:t>
+                        <a:t>67,813</a:t>
                       </a:r>
                     </a:p>
                   </a:txBody>
@@ -23105,7 +24180,7 @@
                           </a:solidFill>
                           <a:latin typeface="Roboto"/>
                         </a:rPr>
-                        <a:t>63,577</a:t>
+                        <a:t>66,341</a:t>
                       </a:r>
                     </a:p>
                   </a:txBody>
@@ -23132,7 +24207,7 @@
                           </a:solidFill>
                           <a:latin typeface="Roboto"/>
                         </a:rPr>
-                        <a:t>6,100</a:t>
+                        <a:t>1,472</a:t>
                       </a:r>
                     </a:p>
                   </a:txBody>
@@ -23660,7 +24735,7 @@
                 </a:solidFill>
                 <a:latin typeface="Roboto"/>
               </a:rPr>
-              <a:t>Data retrieved 2pm, Tue 6 Oct 2026 · Generated 8 Oct 2026, 9:30pm · Sample data · Made with Python (python-pptx)</a:t>
+              <a:t>Data retrieved 2pm, Tue 6 Oct 2026 · Generated 9 Oct 2026, 8:39am · Sample data · Made with Python (python-pptx)</a:t>
             </a:r>
           </a:p>
         </p:txBody>
@@ -23699,7 +24774,7 @@
                 </a:solidFill>
                 <a:latin typeface="Roboto"/>
               </a:rPr>
-              <a:t>Slide 8 of 18</a:t>
+              <a:t>Slide 8 of 19</a:t>
             </a:r>
           </a:p>
         </p:txBody>
@@ -24464,7 +25539,7 @@
                           </a:solidFill>
                           <a:latin typeface="Roboto"/>
                         </a:rPr>
-                        <a:t>15,677</a:t>
+                        <a:t>13,813</a:t>
                       </a:r>
                     </a:p>
                   </a:txBody>
@@ -24491,7 +25566,7 @@
                           </a:solidFill>
                           <a:latin typeface="Roboto"/>
                         </a:rPr>
-                        <a:t>9,477</a:t>
+                        <a:t>12,241</a:t>
                       </a:r>
                     </a:p>
                   </a:txBody>
@@ -24518,7 +25593,7 @@
                           </a:solidFill>
                           <a:latin typeface="Roboto"/>
                         </a:rPr>
-                        <a:t>6,200</a:t>
+                        <a:t>1,572</a:t>
                       </a:r>
                     </a:p>
                   </a:txBody>
@@ -24794,7 +25869,7 @@
                           </a:solidFill>
                           <a:latin typeface="Roboto"/>
                         </a:rPr>
-                        <a:t>10,097</a:t>
+                        <a:t>8,233</a:t>
                       </a:r>
                     </a:p>
                   </a:txBody>
@@ -24821,7 +25896,7 @@
                           </a:solidFill>
                           <a:latin typeface="Roboto"/>
                         </a:rPr>
-                        <a:t>4,077</a:t>
+                        <a:t>6,841</a:t>
                       </a:r>
                     </a:p>
                   </a:txBody>
@@ -24848,7 +25923,7 @@
                           </a:solidFill>
                           <a:latin typeface="Roboto"/>
                         </a:rPr>
-                        <a:t>6,020</a:t>
+                        <a:t>1,392</a:t>
                       </a:r>
                     </a:p>
                   </a:txBody>
@@ -24904,7 +25979,7 @@
                           </a:solidFill>
                           <a:latin typeface="Roboto"/>
                         </a:rPr>
-                        <a:t>(2,524)</a:t>
+                        <a:t>(2,058)</a:t>
                       </a:r>
                     </a:p>
                   </a:txBody>
@@ -24931,7 +26006,7 @@
                           </a:solidFill>
                           <a:latin typeface="Roboto"/>
                         </a:rPr>
-                        <a:t>(1,019)</a:t>
+                        <a:t>(1,710)</a:t>
                       </a:r>
                     </a:p>
                   </a:txBody>
@@ -24958,7 +26033,7 @@
                           </a:solidFill>
                           <a:latin typeface="Roboto"/>
                         </a:rPr>
-                        <a:t>(1,505)</a:t>
+                        <a:t>(348)</a:t>
                       </a:r>
                     </a:p>
                   </a:txBody>
@@ -25014,7 +26089,7 @@
                           </a:solidFill>
                           <a:latin typeface="Roboto"/>
                         </a:rPr>
-                        <a:t>7,573</a:t>
+                        <a:t>6,175</a:t>
                       </a:r>
                     </a:p>
                   </a:txBody>
@@ -25041,7 +26116,7 @@
                           </a:solidFill>
                           <a:latin typeface="Roboto"/>
                         </a:rPr>
-                        <a:t>3,058</a:t>
+                        <a:t>5,131</a:t>
                       </a:r>
                     </a:p>
                   </a:txBody>
@@ -25068,7 +26143,7 @@
                           </a:solidFill>
                           <a:latin typeface="Roboto"/>
                         </a:rPr>
-                        <a:t>4,515</a:t>
+                        <a:t>1,044</a:t>
                       </a:r>
                     </a:p>
                   </a:txBody>
@@ -25156,7 +26231,7 @@
                 </a:solidFill>
                 <a:latin typeface="Roboto"/>
               </a:rPr>
-              <a:t>Data retrieved 2pm, Tue 6 Oct 2026 · Generated 8 Oct 2026, 9:30pm · Sample data · Made with Python (python-pptx)</a:t>
+              <a:t>Data retrieved 2pm, Tue 6 Oct 2026 · Generated 9 Oct 2026, 8:39am · Sample data · Made with Python (python-pptx)</a:t>
             </a:r>
           </a:p>
         </p:txBody>
@@ -25195,7 +26270,7 @@
                 </a:solidFill>
                 <a:latin typeface="Roboto"/>
               </a:rPr>
-              <a:t>Slide 9 of 18</a:t>
+              <a:t>Slide 9 of 19</a:t>
             </a:r>
           </a:p>
         </p:txBody>
